--- a/docs/presentation/MinduelLite-Oral-Project-Report.pptx
+++ b/docs/presentation/MinduelLite-Oral-Project-Report.pptx
@@ -5327,7 +5327,7 @@
                 <a:ea typeface="Calibri" pitchFamily="34" charset="-122"/>
                 <a:cs typeface="Calibri" pitchFamily="34" charset="-120"/>
               </a:rPr>
-              <a:t>6. Evaluation — goal &amp; limitations</a:t>
+              <a:t>6. Evaluation — was the goal achieved?</a:t>
             </a:r>
             <a:endParaRPr lang="en-US" sz="2400" dirty="0"/>
           </a:p>
@@ -5360,41 +5360,14 @@
       </p:sp>
       <p:sp>
         <p:nvSpPr>
-          <p:cNvPr id="4" name="Shape 2"/>
-          <p:cNvSpPr/>
-          <p:nvPr/>
-        </p:nvSpPr>
-        <p:spPr>
-          <a:xfrm>
-            <a:off x="457200" y="1005840"/>
-            <a:ext cx="4023360" cy="3200400"/>
-          </a:xfrm>
-          <a:prstGeom prst="roundRect">
-            <a:avLst>
-              <a:gd name="adj" fmla="val 2286"/>
-            </a:avLst>
-          </a:prstGeom>
-          <a:solidFill>
-            <a:srgbClr val="1A2332"/>
-          </a:solidFill>
-          <a:ln w="12700">
-            <a:solidFill>
-              <a:srgbClr val="3ECF8E"/>
-            </a:solidFill>
-            <a:prstDash val="solid"/>
-          </a:ln>
-        </p:spPr>
-      </p:sp>
-      <p:sp>
-        <p:nvSpPr>
-          <p:cNvPr id="5" name="Text 3"/>
-          <p:cNvSpPr/>
-          <p:nvPr/>
-        </p:nvSpPr>
-        <p:spPr>
-          <a:xfrm>
-            <a:off x="640080" y="1143000"/>
-            <a:ext cx="3657600" cy="292608"/>
+          <p:cNvPr id="4" name="Text 2"/>
+          <p:cNvSpPr/>
+          <p:nvPr/>
+        </p:nvSpPr>
+        <p:spPr>
+          <a:xfrm>
+            <a:off x="457200" y="868680"/>
+            <a:ext cx="8229600" cy="320040"/>
           </a:xfrm>
           <a:prstGeom prst="rect">
             <a:avLst/>
@@ -5415,7 +5388,7 @@
                   <a:srgbClr val="3ECF8E"/>
                 </a:solidFill>
               </a:rPr>
-              <a:t>Goal achieved?</a:t>
+              <a:t>Yes — for the defined academic MVP (not production readiness).</a:t>
             </a:r>
             <a:endParaRPr lang="en-US" sz="1500" dirty="0"/>
           </a:p>
@@ -5423,14 +5396,14 @@
       </p:sp>
       <p:sp>
         <p:nvSpPr>
-          <p:cNvPr id="6" name="Text 4"/>
-          <p:cNvSpPr/>
-          <p:nvPr/>
-        </p:nvSpPr>
-        <p:spPr>
-          <a:xfrm>
-            <a:off x="640080" y="1554480"/>
-            <a:ext cx="3657600" cy="2377440"/>
+          <p:cNvPr id="5" name="Text 3"/>
+          <p:cNvSpPr/>
+          <p:nvPr/>
+        </p:nvSpPr>
+        <p:spPr>
+          <a:xfrm>
+            <a:off x="457200" y="1280160"/>
+            <a:ext cx="4114800" cy="256032"/>
           </a:xfrm>
           <a:prstGeom prst="rect">
             <a:avLst/>
@@ -5439,19 +5412,19 @@
           <a:ln/>
         </p:spPr>
         <p:txBody>
-          <a:bodyPr wrap="square" lIns="0" tIns="0" rIns="0" bIns="0" rtlCol="0" anchor="t"/>
+          <a:bodyPr wrap="square" lIns="0" tIns="0" rIns="0" bIns="0" rtlCol="0" anchor="ctr"/>
           <a:lstStyle/>
           <a:p>
             <a:pPr indent="0" marL="0">
               <a:buNone/>
             </a:pPr>
             <a:r>
-              <a:rPr lang="en-US" sz="1300" dirty="0">
-                <a:solidFill>
-                  <a:srgbClr val="E8EEF7"/>
-                </a:solidFill>
-              </a:rPr>
-              <a:t>Yes — for the defined academic objective: a reliable local full-stack demonstration of Task 2 requirements (SPA, backend, tests, Docker, documentation), not a commercial product.</a:t>
+              <a:rPr lang="en-US" sz="1300" b="1" dirty="0">
+                <a:solidFill>
+                  <a:srgbClr val="4F8CFF"/>
+                </a:solidFill>
+              </a:rPr>
+              <a:t>Evidence</a:t>
             </a:r>
             <a:endParaRPr lang="en-US" sz="1300" dirty="0"/>
           </a:p>
@@ -5459,41 +5432,14 @@
       </p:sp>
       <p:sp>
         <p:nvSpPr>
-          <p:cNvPr id="7" name="Shape 5"/>
-          <p:cNvSpPr/>
-          <p:nvPr/>
-        </p:nvSpPr>
-        <p:spPr>
-          <a:xfrm>
-            <a:off x="4663440" y="1005840"/>
-            <a:ext cx="4023360" cy="3200400"/>
-          </a:xfrm>
-          <a:prstGeom prst="roundRect">
-            <a:avLst>
-              <a:gd name="adj" fmla="val 2286"/>
-            </a:avLst>
-          </a:prstGeom>
-          <a:solidFill>
-            <a:srgbClr val="1A2332"/>
-          </a:solidFill>
-          <a:ln w="12700">
-            <a:solidFill>
-              <a:srgbClr val="334155"/>
-            </a:solidFill>
-            <a:prstDash val="solid"/>
-          </a:ln>
-        </p:spPr>
-      </p:sp>
-      <p:sp>
-        <p:nvSpPr>
-          <p:cNvPr id="8" name="Text 6"/>
-          <p:cNvSpPr/>
-          <p:nvPr/>
-        </p:nvSpPr>
-        <p:spPr>
-          <a:xfrm>
-            <a:off x="4846320" y="1143000"/>
-            <a:ext cx="3657600" cy="292608"/>
+          <p:cNvPr id="6" name="Text 4"/>
+          <p:cNvSpPr/>
+          <p:nvPr/>
+        </p:nvSpPr>
+        <p:spPr>
+          <a:xfrm>
+            <a:off x="457200" y="1554480"/>
+            <a:ext cx="4114800" cy="2834640"/>
           </a:xfrm>
           <a:prstGeom prst="rect">
             <a:avLst/>
@@ -5502,34 +5448,164 @@
           <a:ln/>
         </p:spPr>
         <p:txBody>
-          <a:bodyPr wrap="square" lIns="0" tIns="0" rIns="0" bIns="0" rtlCol="0" anchor="ctr"/>
-          <a:lstStyle/>
-          <a:p>
-            <a:pPr indent="0" marL="0">
-              <a:buNone/>
-            </a:pPr>
-            <a:r>
-              <a:rPr lang="en-US" sz="1500" b="1" dirty="0">
-                <a:solidFill>
-                  <a:srgbClr val="9AABBF"/>
-                </a:solidFill>
-              </a:rPr>
-              <a:t>Known limitations (by design)</a:t>
-            </a:r>
-            <a:endParaRPr lang="en-US" sz="1500" dirty="0"/>
-          </a:p>
-        </p:txBody>
-      </p:sp>
-      <p:sp>
-        <p:nvSpPr>
-          <p:cNvPr id="9" name="Text 7"/>
-          <p:cNvSpPr/>
-          <p:nvPr/>
-        </p:nvSpPr>
-        <p:spPr>
-          <a:xfrm>
-            <a:off x="4846320" y="1554480"/>
-            <a:ext cx="3657600" cy="2377440"/>
+          <a:bodyPr wrap="square" rtlCol="0" anchor="ctr"/>
+          <a:lstStyle/>
+          <a:p>
+            <a:pPr marL="342900" indent="-342900">
+              <a:spcAft>
+                <a:spcPts val="300"/>
+              </a:spcAft>
+              <a:buSzPct val="100000"/>
+              <a:buChar char="•"/>
+            </a:pPr>
+            <a:r>
+              <a:rPr lang="en-US" sz="1200" dirty="0">
+                <a:solidFill>
+                  <a:srgbClr val="E8EEF7"/>
+                </a:solidFill>
+              </a:rPr>
+              <a:t>Two anonymous browser sessions</a:t>
+            </a:r>
+            <a:endParaRPr lang="en-US" sz="1200" dirty="0"/>
+          </a:p>
+          <a:p>
+            <a:pPr marL="342900" indent="-342900">
+              <a:spcAft>
+                <a:spcPts val="300"/>
+              </a:spcAft>
+              <a:buSzPct val="100000"/>
+              <a:buChar char="•"/>
+            </a:pPr>
+            <a:r>
+              <a:rPr lang="en-US" sz="1200" dirty="0">
+                <a:solidFill>
+                  <a:srgbClr val="E8EEF7"/>
+                </a:solidFill>
+              </a:rPr>
+              <a:t>Interest matchmaking (3→2→1)</a:t>
+            </a:r>
+            <a:endParaRPr lang="en-US" sz="1200" dirty="0"/>
+          </a:p>
+          <a:p>
+            <a:pPr marL="342900" indent="-342900">
+              <a:spcAft>
+                <a:spcPts val="300"/>
+              </a:spcAft>
+              <a:buSzPct val="100000"/>
+              <a:buChar char="•"/>
+            </a:pPr>
+            <a:r>
+              <a:rPr lang="en-US" sz="1200" dirty="0">
+                <a:solidFill>
+                  <a:srgbClr val="E8EEF7"/>
+                </a:solidFill>
+              </a:rPr>
+              <a:t>10-question completion + scoring</a:t>
+            </a:r>
+            <a:endParaRPr lang="en-US" sz="1200" dirty="0"/>
+          </a:p>
+          <a:p>
+            <a:pPr marL="342900" indent="-342900">
+              <a:spcAft>
+                <a:spcPts val="300"/>
+              </a:spcAft>
+              <a:buSzPct val="100000"/>
+              <a:buChar char="•"/>
+            </a:pPr>
+            <a:r>
+              <a:rPr lang="en-US" sz="1200" dirty="0">
+                <a:solidFill>
+                  <a:srgbClr val="E8EEF7"/>
+                </a:solidFill>
+              </a:rPr>
+              <a:t>Flags → THREE_FLAGS termination</a:t>
+            </a:r>
+            <a:endParaRPr lang="en-US" sz="1200" dirty="0"/>
+          </a:p>
+          <a:p>
+            <a:pPr marL="342900" indent="-342900">
+              <a:spcAft>
+                <a:spcPts val="300"/>
+              </a:spcAft>
+              <a:buSzPct val="100000"/>
+              <a:buChar char="•"/>
+            </a:pPr>
+            <a:r>
+              <a:rPr lang="en-US" sz="1200" dirty="0">
+                <a:solidFill>
+                  <a:srgbClr val="E8EEF7"/>
+                </a:solidFill>
+              </a:rPr>
+              <a:t>Results exclude flagged scores</a:t>
+            </a:r>
+            <a:endParaRPr lang="en-US" sz="1200" dirty="0"/>
+          </a:p>
+          <a:p>
+            <a:pPr marL="342900" indent="-342900">
+              <a:spcAft>
+                <a:spcPts val="300"/>
+              </a:spcAft>
+              <a:buSzPct val="100000"/>
+              <a:buChar char="•"/>
+            </a:pPr>
+            <a:r>
+              <a:rPr lang="en-US" sz="1200" dirty="0">
+                <a:solidFill>
+                  <a:srgbClr val="E8EEF7"/>
+                </a:solidFill>
+              </a:rPr>
+              <a:t>SPA + API + Postgres integrate</a:t>
+            </a:r>
+            <a:endParaRPr lang="en-US" sz="1200" dirty="0"/>
+          </a:p>
+          <a:p>
+            <a:pPr marL="342900" indent="-342900">
+              <a:spcAft>
+                <a:spcPts val="300"/>
+              </a:spcAft>
+              <a:buSzPct val="100000"/>
+              <a:buChar char="•"/>
+            </a:pPr>
+            <a:r>
+              <a:rPr lang="en-US" sz="1200" dirty="0">
+                <a:solidFill>
+                  <a:srgbClr val="E8EEF7"/>
+                </a:solidFill>
+              </a:rPr>
+              <a:t>Docker Compose one-command run</a:t>
+            </a:r>
+            <a:endParaRPr lang="en-US" sz="1200" dirty="0"/>
+          </a:p>
+          <a:p>
+            <a:pPr marL="342900" indent="-342900">
+              <a:spcAft>
+                <a:spcPts val="300"/>
+              </a:spcAft>
+              <a:buSzPct val="100000"/>
+              <a:buChar char="•"/>
+            </a:pPr>
+            <a:r>
+              <a:rPr lang="en-US" sz="1200" dirty="0">
+                <a:solidFill>
+                  <a:srgbClr val="E8EEF7"/>
+                </a:solidFill>
+              </a:rPr>
+              <a:t>Automated tests pass (FE + BE)</a:t>
+            </a:r>
+            <a:endParaRPr lang="en-US" sz="1200" dirty="0"/>
+          </a:p>
+        </p:txBody>
+      </p:sp>
+      <p:sp>
+        <p:nvSpPr>
+          <p:cNvPr id="7" name="Text 5"/>
+          <p:cNvSpPr/>
+          <p:nvPr/>
+        </p:nvSpPr>
+        <p:spPr>
+          <a:xfrm>
+            <a:off x="4846320" y="1280160"/>
+            <a:ext cx="3840480" cy="256032"/>
           </a:xfrm>
           <a:prstGeom prst="rect">
             <a:avLst/>
@@ -5538,6 +5614,42 @@
           <a:ln/>
         </p:spPr>
         <p:txBody>
+          <a:bodyPr wrap="square" lIns="0" tIns="0" rIns="0" bIns="0" rtlCol="0" anchor="ctr"/>
+          <a:lstStyle/>
+          <a:p>
+            <a:pPr indent="0" marL="0">
+              <a:buNone/>
+            </a:pPr>
+            <a:r>
+              <a:rPr lang="en-US" sz="1300" b="1" dirty="0">
+                <a:solidFill>
+                  <a:srgbClr val="9AABBF"/>
+                </a:solidFill>
+              </a:rPr>
+              <a:t>Limitations (intentional)</a:t>
+            </a:r>
+            <a:endParaRPr lang="en-US" sz="1300" dirty="0"/>
+          </a:p>
+        </p:txBody>
+      </p:sp>
+      <p:sp>
+        <p:nvSpPr>
+          <p:cNvPr id="8" name="Text 6"/>
+          <p:cNvSpPr/>
+          <p:nvPr/>
+        </p:nvSpPr>
+        <p:spPr>
+          <a:xfrm>
+            <a:off x="4846320" y="1645920"/>
+            <a:ext cx="3840480" cy="2651760"/>
+          </a:xfrm>
+          <a:prstGeom prst="rect">
+            <a:avLst/>
+          </a:prstGeom>
+          <a:noFill/>
+          <a:ln/>
+        </p:spPr>
+        <p:txBody>
           <a:bodyPr wrap="square" lIns="0" tIns="0" rIns="0" bIns="0" rtlCol="0" anchor="t"/>
           <a:lstStyle/>
           <a:p>
@@ -5545,20 +5657,20 @@
               <a:buNone/>
             </a:pPr>
             <a:r>
-              <a:rPr lang="en-US" sz="1300" dirty="0">
+              <a:rPr lang="en-US" sz="1200" dirty="0">
                 <a:solidFill>
                   <a:srgbClr val="E8EEF7"/>
                 </a:solidFill>
               </a:rPr>
-              <a:t>No accounts · no production auth · polling not WebSockets · no disconnect recovery · subjective scoring · no moderation/history/audio · local Docker only · no production scale strategy.</a:t>
-            </a:r>
-            <a:endParaRPr lang="en-US" sz="1300" dirty="0"/>
-          </a:p>
-        </p:txBody>
-      </p:sp>
-      <p:sp>
-        <p:nvSpPr>
-          <p:cNvPr id="10" name="Text 8"/>
+              <a:t>Excluded to protect scope and demo reliability: no accounts/production auth, polling not WebSockets, no disconnect recovery, subjective scoring, no moderation/history/audio, local Docker only, no production scale. Design choices — not unfinished MVP work.</a:t>
+            </a:r>
+            <a:endParaRPr lang="en-US" sz="1200" dirty="0"/>
+          </a:p>
+        </p:txBody>
+      </p:sp>
+      <p:sp>
+        <p:nvSpPr>
+          <p:cNvPr id="9" name="Text 7"/>
           <p:cNvSpPr/>
           <p:nvPr/>
         </p:nvSpPr>
@@ -5597,7 +5709,7 @@
       </p:sp>
       <p:sp>
         <p:nvSpPr>
-          <p:cNvPr id="11" name="Text 9"/>
+          <p:cNvPr id="10" name="Text 8"/>
           <p:cNvSpPr/>
           <p:nvPr/>
         </p:nvSpPr>

--- a/docs/presentation/MinduelLite-Oral-Project-Report.pptx
+++ b/docs/presentation/MinduelLite-Oral-Project-Report.pptx
@@ -2396,8 +2396,8 @@
         </p:nvSpPr>
         <p:spPr>
           <a:xfrm>
-            <a:off x="457200" y="1051560"/>
-            <a:ext cx="8229600" cy="594360"/>
+            <a:off x="457200" y="868680"/>
+            <a:ext cx="8229600" cy="502920"/>
           </a:xfrm>
           <a:prstGeom prst="rect">
             <a:avLst/>
@@ -2413,7 +2413,7 @@
               <a:buNone/>
             </a:pPr>
             <a:r>
-              <a:rPr lang="en-US" sz="3800" b="1" dirty="0">
+              <a:rPr lang="en-US" sz="3600" b="1" dirty="0">
                 <a:solidFill>
                   <a:srgbClr val="E8EEF7"/>
                 </a:solidFill>
@@ -2423,7 +2423,7 @@
               </a:rPr>
               <a:t>MINDUEL LITE</a:t>
             </a:r>
-            <a:endParaRPr lang="en-US" sz="3800" dirty="0"/>
+            <a:endParaRPr lang="en-US" sz="3600" dirty="0"/>
           </a:p>
         </p:txBody>
       </p:sp>
@@ -2435,8 +2435,8 @@
         </p:nvSpPr>
         <p:spPr>
           <a:xfrm>
-            <a:off x="457200" y="1691640"/>
-            <a:ext cx="8229600" cy="411480"/>
+            <a:off x="457200" y="1417320"/>
+            <a:ext cx="8229600" cy="594360"/>
           </a:xfrm>
           <a:prstGeom prst="rect">
             <a:avLst/>
@@ -2452,7 +2452,7 @@
               <a:buNone/>
             </a:pPr>
             <a:r>
-              <a:rPr lang="en-US" sz="1600" dirty="0">
+              <a:rPr lang="en-US" sz="1500" dirty="0">
                 <a:solidFill>
                   <a:srgbClr val="9AABBF"/>
                 </a:solidFill>
@@ -2460,9 +2460,9 @@
                 <a:ea typeface="Calibri" pitchFamily="34" charset="-122"/>
                 <a:cs typeface="Calibri" pitchFamily="34" charset="-120"/>
               </a:rPr>
-              <a:t>An Interest-Based Two-Player Intellectual Competition Web Application</a:t>
-            </a:r>
-            <a:endParaRPr lang="en-US" sz="1600" dirty="0"/>
+              <a:t>An Interest-Based Two-Player Live-Audio Intellectual Competition Web Application</a:t>
+            </a:r>
+            <a:endParaRPr lang="en-US" sz="1500" dirty="0"/>
           </a:p>
         </p:txBody>
       </p:sp>
@@ -2474,8 +2474,8 @@
         </p:nvSpPr>
         <p:spPr>
           <a:xfrm>
-            <a:off x="457200" y="2286000"/>
-            <a:ext cx="8229600" cy="868680"/>
+            <a:off x="457200" y="2103120"/>
+            <a:ext cx="8229600" cy="822960"/>
           </a:xfrm>
           <a:prstGeom prst="rect">
             <a:avLst/>
@@ -2491,7 +2491,7 @@
               <a:buNone/>
             </a:pPr>
             <a:r>
-              <a:rPr lang="en-US" sz="1400" dirty="0">
+              <a:rPr lang="en-US" sz="1300" dirty="0">
                 <a:solidFill>
                   <a:srgbClr val="9AABBF"/>
                 </a:solidFill>
@@ -2501,14 +2501,14 @@
               </a:rPr>
               <a:t>IU International University of Applied Sciences</a:t>
             </a:r>
-            <a:endParaRPr lang="en-US" sz="1400" dirty="0"/>
-          </a:p>
-          <a:p>
-            <a:pPr indent="0" marL="0">
-              <a:buNone/>
-            </a:pPr>
-            <a:r>
-              <a:rPr lang="en-US" sz="1400" dirty="0">
+            <a:endParaRPr lang="en-US" sz="1300" dirty="0"/>
+          </a:p>
+          <a:p>
+            <a:pPr indent="0" marL="0">
+              <a:buNone/>
+            </a:pPr>
+            <a:r>
+              <a:rPr lang="en-US" sz="1300" dirty="0">
                 <a:solidFill>
                   <a:srgbClr val="9AABBF"/>
                 </a:solidFill>
@@ -2518,14 +2518,14 @@
               </a:rPr>
               <a:t>Course: DLBSEPPSD01_E — Software Development</a:t>
             </a:r>
-            <a:endParaRPr lang="en-US" sz="1400" dirty="0"/>
-          </a:p>
-          <a:p>
-            <a:pPr indent="0" marL="0">
-              <a:buNone/>
-            </a:pPr>
-            <a:r>
-              <a:rPr lang="en-US" sz="1400" dirty="0">
+            <a:endParaRPr lang="en-US" sz="1300" dirty="0"/>
+          </a:p>
+          <a:p>
+            <a:pPr indent="0" marL="0">
+              <a:buNone/>
+            </a:pPr>
+            <a:r>
+              <a:rPr lang="en-US" sz="1300" dirty="0">
                 <a:solidFill>
                   <a:srgbClr val="9AABBF"/>
                 </a:solidFill>
@@ -2535,7 +2535,7 @@
               </a:rPr>
               <a:t>Examination: Oral Project Report · Task 2 — Development of a Web Application</a:t>
             </a:r>
-            <a:endParaRPr lang="en-US" sz="1400" dirty="0"/>
+            <a:endParaRPr lang="en-US" sz="1300" dirty="0"/>
           </a:p>
         </p:txBody>
       </p:sp>
@@ -2678,17 +2678,17 @@
               <a:buNone/>
             </a:pPr>
             <a:r>
-              <a:rPr lang="en-US" sz="1200" i="1" dirty="0">
-                <a:solidFill>
-                  <a:srgbClr val="334155"/>
+              <a:rPr lang="en-US" sz="1300" dirty="0">
+                <a:solidFill>
+                  <a:srgbClr val="9AABBF"/>
                 </a:solidFill>
                 <a:latin typeface="Calibri" pitchFamily="34" charset="0"/>
                 <a:ea typeface="Calibri" pitchFamily="34" charset="-122"/>
                 <a:cs typeface="Calibri" pitchFamily="34" charset="-120"/>
               </a:rPr>
-              <a:t>Student name  ·  Matriculation number  ·  [replace before submission]</a:t>
-            </a:r>
-            <a:endParaRPr lang="en-US" sz="1200" dirty="0"/>
+              <a:t>Mahmoud B. Kanaan  ·  Matriculation number: see IU myCampus</a:t>
+            </a:r>
+            <a:endParaRPr lang="en-US" sz="1300" dirty="0"/>
           </a:p>
         </p:txBody>
       </p:sp>
@@ -2835,7 +2835,7 @@
                 <a:ea typeface="Calibri" pitchFamily="34" charset="-122"/>
                 <a:cs typeface="Calibri" pitchFamily="34" charset="-120"/>
               </a:rPr>
-              <a:t>3. Architecture — matchmaking logic</a:t>
+              <a:t>4. Implementation — LiveKit token &amp; MatchAudio</a:t>
             </a:r>
             <a:endParaRPr lang="en-US" sz="2400" dirty="0"/>
           </a:p>
@@ -2874,8 +2874,8 @@
         </p:nvSpPr>
         <p:spPr>
           <a:xfrm>
-            <a:off x="457200" y="1005840"/>
-            <a:ext cx="8229600" cy="365760"/>
+            <a:off x="365760" y="868680"/>
+            <a:ext cx="4206240" cy="256032"/>
           </a:xfrm>
           <a:prstGeom prst="rect">
             <a:avLst/>
@@ -2891,1091 +2891,314 @@
               <a:buNone/>
             </a:pPr>
             <a:r>
-              <a:rPr lang="en-US" sz="2000" b="1" dirty="0">
-                <a:solidFill>
-                  <a:srgbClr val="3ECF8E"/>
+              <a:rPr lang="en-US" sz="1100" b="1" dirty="0">
+                <a:solidFill>
+                  <a:srgbClr val="4F8CFF"/>
+                </a:solidFill>
+              </a:rPr>
+              <a:t>audioTokenService.js — signed grant (secret on server only)</a:t>
+            </a:r>
+            <a:endParaRPr lang="en-US" sz="1100" dirty="0"/>
+          </a:p>
+        </p:txBody>
+      </p:sp>
+      <p:sp>
+        <p:nvSpPr>
+          <p:cNvPr id="5" name="Shape 3"/>
+          <p:cNvSpPr/>
+          <p:nvPr/>
+        </p:nvSpPr>
+        <p:spPr>
+          <a:xfrm>
+            <a:off x="320040" y="1143000"/>
+            <a:ext cx="4297680" cy="3246120"/>
+          </a:xfrm>
+          <a:prstGeom prst="roundRect">
+            <a:avLst>
+              <a:gd name="adj" fmla="val 1690"/>
+            </a:avLst>
+          </a:prstGeom>
+          <a:solidFill>
+            <a:srgbClr val="121A24"/>
+          </a:solidFill>
+          <a:ln w="12700">
+            <a:solidFill>
+              <a:srgbClr val="334155"/>
+            </a:solidFill>
+            <a:prstDash val="solid"/>
+          </a:ln>
+        </p:spPr>
+      </p:sp>
+      <p:sp>
+        <p:nvSpPr>
+          <p:cNvPr id="6" name="Text 4"/>
+          <p:cNvSpPr/>
+          <p:nvPr/>
+        </p:nvSpPr>
+        <p:spPr>
+          <a:xfrm>
+            <a:off x="457200" y="1234440"/>
+            <a:ext cx="4023360" cy="3017520"/>
+          </a:xfrm>
+          <a:prstGeom prst="rect">
+            <a:avLst/>
+          </a:prstGeom>
+          <a:noFill/>
+          <a:ln/>
+        </p:spPr>
+        <p:txBody>
+          <a:bodyPr wrap="square" lIns="0" tIns="0" rIns="0" bIns="0" rtlCol="0" anchor="t"/>
+          <a:lstStyle/>
+          <a:p>
+            <a:pPr indent="0" marL="0">
+              <a:buNone/>
+            </a:pPr>
+            <a:r>
+              <a:rPr lang="en-US" sz="1000" dirty="0">
+                <a:solidFill>
+                  <a:srgbClr val="C8D6E5"/>
                 </a:solidFill>
                 <a:latin typeface="Consolas" pitchFamily="34" charset="0"/>
                 <a:ea typeface="Consolas" pitchFamily="34" charset="-122"/>
                 <a:cs typeface="Consolas" pitchFamily="34" charset="-120"/>
               </a:rPr>
-              <a:t>similarity = sharedInterestCount / 3</a:t>
-            </a:r>
-            <a:endParaRPr lang="en-US" sz="2000" dirty="0"/>
-          </a:p>
-        </p:txBody>
-      </p:sp>
-      <p:graphicFrame>
-        <p:nvGraphicFramePr>
-          <p:cNvPr id="11" name="Table 0"/>
-          <p:cNvGraphicFramePr>
-            <a:graphicFrameLocks noGrp="1"/>
-          </p:cNvGraphicFramePr>
-          <p:nvPr>
-            <p:extLst>
-              <p:ext uri="{D42A27DB-BD31-4B8C-83A1-F6EECF244321}">
-                <p14:modId xmlns:p14="http://schemas.microsoft.com/office/powerpoint/2010/main" val="1579011935"/>
-              </p:ext>
-            </p:extLst>
-          </p:nvPr>
-        </p:nvGraphicFramePr>
-        <p:xfrm>
-          <a:off x="457200" y="1554480"/>
-          <a:ext cx="4937760" cy="2286000"/>
-        </p:xfrm>
-        <a:graphic>
-          <a:graphicData uri="http://schemas.openxmlformats.org/drawingml/2006/table">
-            <a:tbl>
-              <a:tblPr/>
-              <a:tblGrid>
-                <a:gridCol w="1097280"/>
-                <a:gridCol w="1371600"/>
-                <a:gridCol w="2468880"/>
-              </a:tblGrid>
-              <a:tr h="457200">
-                <a:tc>
-                  <a:txBody>
-                    <a:bodyPr/>
-                    <a:lstStyle/>
-                    <a:p>
-                      <a:pPr indent="0" marL="0">
-                        <a:buNone/>
-                      </a:pPr>
-                      <a:r>
-                        <a:rPr lang="en-US" sz="1300" b="1" dirty="0">
-                          <a:solidFill>
-                            <a:srgbClr val="FFFFFF"/>
-                          </a:solidFill>
-                          <a:latin typeface="Calibri" pitchFamily="34" charset="0"/>
-                          <a:ea typeface="Calibri" pitchFamily="34" charset="-122"/>
-                          <a:cs typeface="Calibri" pitchFamily="34" charset="-120"/>
-                        </a:rPr>
-                        <a:t>Shared</a:t>
-                      </a:r>
-                      <a:endParaRPr lang="en-US" sz="1300" dirty="0">
-                        <a:latin typeface="Calibri" charset="0"/>
-                        <a:ea typeface="Calibri" charset="0"/>
-                        <a:cs typeface="Calibri" charset="0"/>
-                      </a:endParaRPr>
-                    </a:p>
-                  </a:txBody>
-                  <a:tcPr marL="91440" marR="91440" marT="45720" marB="45720" anchor="ctr">
-                    <a:lnL w="6350" cap="flat" cmpd="sng" algn="ctr">
-                      <a:solidFill>
-                        <a:srgbClr val="334155"/>
-                      </a:solidFill>
-                      <a:prstDash val="solid"/>
-                      <a:round/>
-                      <a:headEnd type="none" w="med" len="med"/>
-                      <a:tailEnd type="none" w="med" len="med"/>
-                    </a:lnL>
-                    <a:lnR w="6350" cap="flat" cmpd="sng" algn="ctr">
-                      <a:solidFill>
-                        <a:srgbClr val="334155"/>
-                      </a:solidFill>
-                      <a:prstDash val="solid"/>
-                      <a:round/>
-                      <a:headEnd type="none" w="med" len="med"/>
-                      <a:tailEnd type="none" w="med" len="med"/>
-                    </a:lnR>
-                    <a:lnT w="6350" cap="flat" cmpd="sng" algn="ctr">
-                      <a:solidFill>
-                        <a:srgbClr val="334155"/>
-                      </a:solidFill>
-                      <a:prstDash val="solid"/>
-                      <a:round/>
-                      <a:headEnd type="none" w="med" len="med"/>
-                      <a:tailEnd type="none" w="med" len="med"/>
-                    </a:lnT>
-                    <a:lnB w="6350" cap="flat" cmpd="sng" algn="ctr">
-                      <a:solidFill>
-                        <a:srgbClr val="334155"/>
-                      </a:solidFill>
-                      <a:prstDash val="solid"/>
-                      <a:round/>
-                      <a:headEnd type="none" w="med" len="med"/>
-                      <a:tailEnd type="none" w="med" len="med"/>
-                    </a:lnB>
-                    <a:solidFill>
-                      <a:srgbClr val="1E3A5F"/>
-                    </a:solidFill>
-                  </a:tcPr>
-                </a:tc>
-                <a:tc>
-                  <a:txBody>
-                    <a:bodyPr/>
-                    <a:lstStyle/>
-                    <a:p>
-                      <a:pPr indent="0" marL="0">
-                        <a:buNone/>
-                      </a:pPr>
-                      <a:r>
-                        <a:rPr lang="en-US" sz="1300" b="1" dirty="0">
-                          <a:solidFill>
-                            <a:srgbClr val="FFFFFF"/>
-                          </a:solidFill>
-                          <a:latin typeface="Calibri" pitchFamily="34" charset="0"/>
-                          <a:ea typeface="Calibri" pitchFamily="34" charset="-122"/>
-                          <a:cs typeface="Calibri" pitchFamily="34" charset="-120"/>
-                        </a:rPr>
-                        <a:t>Similarity</a:t>
-                      </a:r>
-                      <a:endParaRPr lang="en-US" sz="1300" dirty="0">
-                        <a:latin typeface="Calibri" charset="0"/>
-                        <a:ea typeface="Calibri" charset="0"/>
-                        <a:cs typeface="Calibri" charset="0"/>
-                      </a:endParaRPr>
-                    </a:p>
-                  </a:txBody>
-                  <a:tcPr marL="91440" marR="91440" marT="45720" marB="45720" anchor="ctr">
-                    <a:lnL w="6350" cap="flat" cmpd="sng" algn="ctr">
-                      <a:solidFill>
-                        <a:srgbClr val="334155"/>
-                      </a:solidFill>
-                      <a:prstDash val="solid"/>
-                      <a:round/>
-                      <a:headEnd type="none" w="med" len="med"/>
-                      <a:tailEnd type="none" w="med" len="med"/>
-                    </a:lnL>
-                    <a:lnR w="6350" cap="flat" cmpd="sng" algn="ctr">
-                      <a:solidFill>
-                        <a:srgbClr val="334155"/>
-                      </a:solidFill>
-                      <a:prstDash val="solid"/>
-                      <a:round/>
-                      <a:headEnd type="none" w="med" len="med"/>
-                      <a:tailEnd type="none" w="med" len="med"/>
-                    </a:lnR>
-                    <a:lnT w="6350" cap="flat" cmpd="sng" algn="ctr">
-                      <a:solidFill>
-                        <a:srgbClr val="334155"/>
-                      </a:solidFill>
-                      <a:prstDash val="solid"/>
-                      <a:round/>
-                      <a:headEnd type="none" w="med" len="med"/>
-                      <a:tailEnd type="none" w="med" len="med"/>
-                    </a:lnT>
-                    <a:lnB w="6350" cap="flat" cmpd="sng" algn="ctr">
-                      <a:solidFill>
-                        <a:srgbClr val="334155"/>
-                      </a:solidFill>
-                      <a:prstDash val="solid"/>
-                      <a:round/>
-                      <a:headEnd type="none" w="med" len="med"/>
-                      <a:tailEnd type="none" w="med" len="med"/>
-                    </a:lnB>
-                    <a:solidFill>
-                      <a:srgbClr val="1E3A5F"/>
-                    </a:solidFill>
-                  </a:tcPr>
-                </a:tc>
-                <a:tc>
-                  <a:txBody>
-                    <a:bodyPr/>
-                    <a:lstStyle/>
-                    <a:p>
-                      <a:pPr indent="0" marL="0">
-                        <a:buNone/>
-                      </a:pPr>
-                      <a:r>
-                        <a:rPr lang="en-US" sz="1300" b="1" dirty="0">
-                          <a:solidFill>
-                            <a:srgbClr val="FFFFFF"/>
-                          </a:solidFill>
-                          <a:latin typeface="Calibri" pitchFamily="34" charset="0"/>
-                          <a:ea typeface="Calibri" pitchFamily="34" charset="-122"/>
-                          <a:cs typeface="Calibri" pitchFamily="34" charset="-120"/>
-                        </a:rPr>
-                        <a:t>Matchmaking</a:t>
-                      </a:r>
-                      <a:endParaRPr lang="en-US" sz="1300" dirty="0">
-                        <a:latin typeface="Calibri" charset="0"/>
-                        <a:ea typeface="Calibri" charset="0"/>
-                        <a:cs typeface="Calibri" charset="0"/>
-                      </a:endParaRPr>
-                    </a:p>
-                  </a:txBody>
-                  <a:tcPr marL="91440" marR="91440" marT="45720" marB="45720" anchor="ctr">
-                    <a:lnL w="6350" cap="flat" cmpd="sng" algn="ctr">
-                      <a:solidFill>
-                        <a:srgbClr val="334155"/>
-                      </a:solidFill>
-                      <a:prstDash val="solid"/>
-                      <a:round/>
-                      <a:headEnd type="none" w="med" len="med"/>
-                      <a:tailEnd type="none" w="med" len="med"/>
-                    </a:lnL>
-                    <a:lnR w="6350" cap="flat" cmpd="sng" algn="ctr">
-                      <a:solidFill>
-                        <a:srgbClr val="334155"/>
-                      </a:solidFill>
-                      <a:prstDash val="solid"/>
-                      <a:round/>
-                      <a:headEnd type="none" w="med" len="med"/>
-                      <a:tailEnd type="none" w="med" len="med"/>
-                    </a:lnR>
-                    <a:lnT w="6350" cap="flat" cmpd="sng" algn="ctr">
-                      <a:solidFill>
-                        <a:srgbClr val="334155"/>
-                      </a:solidFill>
-                      <a:prstDash val="solid"/>
-                      <a:round/>
-                      <a:headEnd type="none" w="med" len="med"/>
-                      <a:tailEnd type="none" w="med" len="med"/>
-                    </a:lnT>
-                    <a:lnB w="6350" cap="flat" cmpd="sng" algn="ctr">
-                      <a:solidFill>
-                        <a:srgbClr val="334155"/>
-                      </a:solidFill>
-                      <a:prstDash val="solid"/>
-                      <a:round/>
-                      <a:headEnd type="none" w="med" len="med"/>
-                      <a:tailEnd type="none" w="med" len="med"/>
-                    </a:lnB>
-                    <a:solidFill>
-                      <a:srgbClr val="1E3A5F"/>
-                    </a:solidFill>
-                  </a:tcPr>
-                </a:tc>
-              </a:tr>
-              <a:tr h="457200">
-                <a:tc>
-                  <a:txBody>
-                    <a:bodyPr/>
-                    <a:lstStyle/>
-                    <a:p>
-                      <a:pPr indent="0" marL="0">
-                        <a:buNone/>
-                      </a:pPr>
-                      <a:r>
-                        <a:rPr lang="en-US" sz="1300" dirty="0">
-                          <a:solidFill>
-                            <a:srgbClr val="E8EEF7"/>
-                          </a:solidFill>
-                          <a:latin typeface="Calibri" pitchFamily="34" charset="0"/>
-                          <a:ea typeface="Calibri" pitchFamily="34" charset="-122"/>
-                          <a:cs typeface="Calibri" pitchFamily="34" charset="-120"/>
-                        </a:rPr>
-                        <a:t>3</a:t>
-                      </a:r>
-                      <a:endParaRPr lang="en-US" sz="1300" dirty="0">
-                        <a:latin typeface="Calibri" charset="0"/>
-                        <a:ea typeface="Calibri" charset="0"/>
-                        <a:cs typeface="Calibri" charset="0"/>
-                      </a:endParaRPr>
-                    </a:p>
-                  </a:txBody>
-                  <a:tcPr marL="91440" marR="91440" marT="45720" marB="45720" anchor="ctr">
-                    <a:lnL w="6350" cap="flat" cmpd="sng" algn="ctr">
-                      <a:solidFill>
-                        <a:srgbClr val="334155"/>
-                      </a:solidFill>
-                      <a:prstDash val="solid"/>
-                      <a:round/>
-                      <a:headEnd type="none" w="med" len="med"/>
-                      <a:tailEnd type="none" w="med" len="med"/>
-                    </a:lnL>
-                    <a:lnR w="6350" cap="flat" cmpd="sng" algn="ctr">
-                      <a:solidFill>
-                        <a:srgbClr val="334155"/>
-                      </a:solidFill>
-                      <a:prstDash val="solid"/>
-                      <a:round/>
-                      <a:headEnd type="none" w="med" len="med"/>
-                      <a:tailEnd type="none" w="med" len="med"/>
-                    </a:lnR>
-                    <a:lnT w="6350" cap="flat" cmpd="sng" algn="ctr">
-                      <a:solidFill>
-                        <a:srgbClr val="334155"/>
-                      </a:solidFill>
-                      <a:prstDash val="solid"/>
-                      <a:round/>
-                      <a:headEnd type="none" w="med" len="med"/>
-                      <a:tailEnd type="none" w="med" len="med"/>
-                    </a:lnT>
-                    <a:lnB w="6350" cap="flat" cmpd="sng" algn="ctr">
-                      <a:solidFill>
-                        <a:srgbClr val="334155"/>
-                      </a:solidFill>
-                      <a:prstDash val="solid"/>
-                      <a:round/>
-                      <a:headEnd type="none" w="med" len="med"/>
-                      <a:tailEnd type="none" w="med" len="med"/>
-                    </a:lnB>
-                    <a:solidFill>
-                      <a:srgbClr val="1A2332"/>
-                    </a:solidFill>
-                  </a:tcPr>
-                </a:tc>
-                <a:tc>
-                  <a:txBody>
-                    <a:bodyPr/>
-                    <a:lstStyle/>
-                    <a:p>
-                      <a:pPr indent="0" marL="0">
-                        <a:buNone/>
-                      </a:pPr>
-                      <a:r>
-                        <a:rPr lang="en-US" sz="1300" dirty="0">
-                          <a:solidFill>
-                            <a:srgbClr val="E8EEF7"/>
-                          </a:solidFill>
-                          <a:latin typeface="Calibri" pitchFamily="34" charset="0"/>
-                          <a:ea typeface="Calibri" pitchFamily="34" charset="-122"/>
-                          <a:cs typeface="Calibri" pitchFamily="34" charset="-120"/>
-                        </a:rPr>
-                        <a:t>1.00</a:t>
-                      </a:r>
-                      <a:endParaRPr lang="en-US" sz="1300" dirty="0">
-                        <a:latin typeface="Calibri" charset="0"/>
-                        <a:ea typeface="Calibri" charset="0"/>
-                        <a:cs typeface="Calibri" charset="0"/>
-                      </a:endParaRPr>
-                    </a:p>
-                  </a:txBody>
-                  <a:tcPr marL="91440" marR="91440" marT="45720" marB="45720" anchor="ctr">
-                    <a:lnL w="6350" cap="flat" cmpd="sng" algn="ctr">
-                      <a:solidFill>
-                        <a:srgbClr val="334155"/>
-                      </a:solidFill>
-                      <a:prstDash val="solid"/>
-                      <a:round/>
-                      <a:headEnd type="none" w="med" len="med"/>
-                      <a:tailEnd type="none" w="med" len="med"/>
-                    </a:lnL>
-                    <a:lnR w="6350" cap="flat" cmpd="sng" algn="ctr">
-                      <a:solidFill>
-                        <a:srgbClr val="334155"/>
-                      </a:solidFill>
-                      <a:prstDash val="solid"/>
-                      <a:round/>
-                      <a:headEnd type="none" w="med" len="med"/>
-                      <a:tailEnd type="none" w="med" len="med"/>
-                    </a:lnR>
-                    <a:lnT w="6350" cap="flat" cmpd="sng" algn="ctr">
-                      <a:solidFill>
-                        <a:srgbClr val="334155"/>
-                      </a:solidFill>
-                      <a:prstDash val="solid"/>
-                      <a:round/>
-                      <a:headEnd type="none" w="med" len="med"/>
-                      <a:tailEnd type="none" w="med" len="med"/>
-                    </a:lnT>
-                    <a:lnB w="6350" cap="flat" cmpd="sng" algn="ctr">
-                      <a:solidFill>
-                        <a:srgbClr val="334155"/>
-                      </a:solidFill>
-                      <a:prstDash val="solid"/>
-                      <a:round/>
-                      <a:headEnd type="none" w="med" len="med"/>
-                      <a:tailEnd type="none" w="med" len="med"/>
-                    </a:lnB>
-                    <a:solidFill>
-                      <a:srgbClr val="1A2332"/>
-                    </a:solidFill>
-                  </a:tcPr>
-                </a:tc>
-                <a:tc>
-                  <a:txBody>
-                    <a:bodyPr/>
-                    <a:lstStyle/>
-                    <a:p>
-                      <a:pPr indent="0" marL="0">
-                        <a:buNone/>
-                      </a:pPr>
-                      <a:r>
-                        <a:rPr lang="en-US" sz="1300" dirty="0">
-                          <a:solidFill>
-                            <a:srgbClr val="E8EEF7"/>
-                          </a:solidFill>
-                          <a:latin typeface="Calibri" pitchFamily="34" charset="0"/>
-                          <a:ea typeface="Calibri" pitchFamily="34" charset="-122"/>
-                          <a:cs typeface="Calibri" pitchFamily="34" charset="-120"/>
-                        </a:rPr>
-                        <a:t>Highest priority</a:t>
-                      </a:r>
-                      <a:endParaRPr lang="en-US" sz="1300" dirty="0">
-                        <a:latin typeface="Calibri" charset="0"/>
-                        <a:ea typeface="Calibri" charset="0"/>
-                        <a:cs typeface="Calibri" charset="0"/>
-                      </a:endParaRPr>
-                    </a:p>
-                  </a:txBody>
-                  <a:tcPr marL="91440" marR="91440" marT="45720" marB="45720" anchor="ctr">
-                    <a:lnL w="6350" cap="flat" cmpd="sng" algn="ctr">
-                      <a:solidFill>
-                        <a:srgbClr val="334155"/>
-                      </a:solidFill>
-                      <a:prstDash val="solid"/>
-                      <a:round/>
-                      <a:headEnd type="none" w="med" len="med"/>
-                      <a:tailEnd type="none" w="med" len="med"/>
-                    </a:lnL>
-                    <a:lnR w="6350" cap="flat" cmpd="sng" algn="ctr">
-                      <a:solidFill>
-                        <a:srgbClr val="334155"/>
-                      </a:solidFill>
-                      <a:prstDash val="solid"/>
-                      <a:round/>
-                      <a:headEnd type="none" w="med" len="med"/>
-                      <a:tailEnd type="none" w="med" len="med"/>
-                    </a:lnR>
-                    <a:lnT w="6350" cap="flat" cmpd="sng" algn="ctr">
-                      <a:solidFill>
-                        <a:srgbClr val="334155"/>
-                      </a:solidFill>
-                      <a:prstDash val="solid"/>
-                      <a:round/>
-                      <a:headEnd type="none" w="med" len="med"/>
-                      <a:tailEnd type="none" w="med" len="med"/>
-                    </a:lnT>
-                    <a:lnB w="6350" cap="flat" cmpd="sng" algn="ctr">
-                      <a:solidFill>
-                        <a:srgbClr val="334155"/>
-                      </a:solidFill>
-                      <a:prstDash val="solid"/>
-                      <a:round/>
-                      <a:headEnd type="none" w="med" len="med"/>
-                      <a:tailEnd type="none" w="med" len="med"/>
-                    </a:lnB>
-                    <a:solidFill>
-                      <a:srgbClr val="1A2332"/>
-                    </a:solidFill>
-                  </a:tcPr>
-                </a:tc>
-              </a:tr>
-              <a:tr h="457200">
-                <a:tc>
-                  <a:txBody>
-                    <a:bodyPr/>
-                    <a:lstStyle/>
-                    <a:p>
-                      <a:pPr indent="0" marL="0">
-                        <a:buNone/>
-                      </a:pPr>
-                      <a:r>
-                        <a:rPr lang="en-US" sz="1300" dirty="0">
-                          <a:solidFill>
-                            <a:srgbClr val="E8EEF7"/>
-                          </a:solidFill>
-                          <a:latin typeface="Calibri" pitchFamily="34" charset="0"/>
-                          <a:ea typeface="Calibri" pitchFamily="34" charset="-122"/>
-                          <a:cs typeface="Calibri" pitchFamily="34" charset="-120"/>
-                        </a:rPr>
-                        <a:t>2</a:t>
-                      </a:r>
-                      <a:endParaRPr lang="en-US" sz="1300" dirty="0">
-                        <a:latin typeface="Calibri" charset="0"/>
-                        <a:ea typeface="Calibri" charset="0"/>
-                        <a:cs typeface="Calibri" charset="0"/>
-                      </a:endParaRPr>
-                    </a:p>
-                  </a:txBody>
-                  <a:tcPr marL="91440" marR="91440" marT="45720" marB="45720" anchor="ctr">
-                    <a:lnL w="6350" cap="flat" cmpd="sng" algn="ctr">
-                      <a:solidFill>
-                        <a:srgbClr val="334155"/>
-                      </a:solidFill>
-                      <a:prstDash val="solid"/>
-                      <a:round/>
-                      <a:headEnd type="none" w="med" len="med"/>
-                      <a:tailEnd type="none" w="med" len="med"/>
-                    </a:lnL>
-                    <a:lnR w="6350" cap="flat" cmpd="sng" algn="ctr">
-                      <a:solidFill>
-                        <a:srgbClr val="334155"/>
-                      </a:solidFill>
-                      <a:prstDash val="solid"/>
-                      <a:round/>
-                      <a:headEnd type="none" w="med" len="med"/>
-                      <a:tailEnd type="none" w="med" len="med"/>
-                    </a:lnR>
-                    <a:lnT w="6350" cap="flat" cmpd="sng" algn="ctr">
-                      <a:solidFill>
-                        <a:srgbClr val="334155"/>
-                      </a:solidFill>
-                      <a:prstDash val="solid"/>
-                      <a:round/>
-                      <a:headEnd type="none" w="med" len="med"/>
-                      <a:tailEnd type="none" w="med" len="med"/>
-                    </a:lnT>
-                    <a:lnB w="6350" cap="flat" cmpd="sng" algn="ctr">
-                      <a:solidFill>
-                        <a:srgbClr val="334155"/>
-                      </a:solidFill>
-                      <a:prstDash val="solid"/>
-                      <a:round/>
-                      <a:headEnd type="none" w="med" len="med"/>
-                      <a:tailEnd type="none" w="med" len="med"/>
-                    </a:lnB>
-                    <a:solidFill>
-                      <a:srgbClr val="1A2332"/>
-                    </a:solidFill>
-                  </a:tcPr>
-                </a:tc>
-                <a:tc>
-                  <a:txBody>
-                    <a:bodyPr/>
-                    <a:lstStyle/>
-                    <a:p>
-                      <a:pPr indent="0" marL="0">
-                        <a:buNone/>
-                      </a:pPr>
-                      <a:r>
-                        <a:rPr lang="en-US" sz="1300" dirty="0">
-                          <a:solidFill>
-                            <a:srgbClr val="E8EEF7"/>
-                          </a:solidFill>
-                          <a:latin typeface="Calibri" pitchFamily="34" charset="0"/>
-                          <a:ea typeface="Calibri" pitchFamily="34" charset="-122"/>
-                          <a:cs typeface="Calibri" pitchFamily="34" charset="-120"/>
-                        </a:rPr>
-                        <a:t>≈ 0.67</a:t>
-                      </a:r>
-                      <a:endParaRPr lang="en-US" sz="1300" dirty="0">
-                        <a:latin typeface="Calibri" charset="0"/>
-                        <a:ea typeface="Calibri" charset="0"/>
-                        <a:cs typeface="Calibri" charset="0"/>
-                      </a:endParaRPr>
-                    </a:p>
-                  </a:txBody>
-                  <a:tcPr marL="91440" marR="91440" marT="45720" marB="45720" anchor="ctr">
-                    <a:lnL w="6350" cap="flat" cmpd="sng" algn="ctr">
-                      <a:solidFill>
-                        <a:srgbClr val="334155"/>
-                      </a:solidFill>
-                      <a:prstDash val="solid"/>
-                      <a:round/>
-                      <a:headEnd type="none" w="med" len="med"/>
-                      <a:tailEnd type="none" w="med" len="med"/>
-                    </a:lnL>
-                    <a:lnR w="6350" cap="flat" cmpd="sng" algn="ctr">
-                      <a:solidFill>
-                        <a:srgbClr val="334155"/>
-                      </a:solidFill>
-                      <a:prstDash val="solid"/>
-                      <a:round/>
-                      <a:headEnd type="none" w="med" len="med"/>
-                      <a:tailEnd type="none" w="med" len="med"/>
-                    </a:lnR>
-                    <a:lnT w="6350" cap="flat" cmpd="sng" algn="ctr">
-                      <a:solidFill>
-                        <a:srgbClr val="334155"/>
-                      </a:solidFill>
-                      <a:prstDash val="solid"/>
-                      <a:round/>
-                      <a:headEnd type="none" w="med" len="med"/>
-                      <a:tailEnd type="none" w="med" len="med"/>
-                    </a:lnT>
-                    <a:lnB w="6350" cap="flat" cmpd="sng" algn="ctr">
-                      <a:solidFill>
-                        <a:srgbClr val="334155"/>
-                      </a:solidFill>
-                      <a:prstDash val="solid"/>
-                      <a:round/>
-                      <a:headEnd type="none" w="med" len="med"/>
-                      <a:tailEnd type="none" w="med" len="med"/>
-                    </a:lnB>
-                    <a:solidFill>
-                      <a:srgbClr val="1A2332"/>
-                    </a:solidFill>
-                  </a:tcPr>
-                </a:tc>
-                <a:tc>
-                  <a:txBody>
-                    <a:bodyPr/>
-                    <a:lstStyle/>
-                    <a:p>
-                      <a:pPr indent="0" marL="0">
-                        <a:buNone/>
-                      </a:pPr>
-                      <a:r>
-                        <a:rPr lang="en-US" sz="1300" dirty="0">
-                          <a:solidFill>
-                            <a:srgbClr val="E8EEF7"/>
-                          </a:solidFill>
-                          <a:latin typeface="Calibri" pitchFamily="34" charset="0"/>
-                          <a:ea typeface="Calibri" pitchFamily="34" charset="-122"/>
-                          <a:cs typeface="Calibri" pitchFamily="34" charset="-120"/>
-                        </a:rPr>
-                        <a:t>Next</a:t>
-                      </a:r>
-                      <a:endParaRPr lang="en-US" sz="1300" dirty="0">
-                        <a:latin typeface="Calibri" charset="0"/>
-                        <a:ea typeface="Calibri" charset="0"/>
-                        <a:cs typeface="Calibri" charset="0"/>
-                      </a:endParaRPr>
-                    </a:p>
-                  </a:txBody>
-                  <a:tcPr marL="91440" marR="91440" marT="45720" marB="45720" anchor="ctr">
-                    <a:lnL w="6350" cap="flat" cmpd="sng" algn="ctr">
-                      <a:solidFill>
-                        <a:srgbClr val="334155"/>
-                      </a:solidFill>
-                      <a:prstDash val="solid"/>
-                      <a:round/>
-                      <a:headEnd type="none" w="med" len="med"/>
-                      <a:tailEnd type="none" w="med" len="med"/>
-                    </a:lnL>
-                    <a:lnR w="6350" cap="flat" cmpd="sng" algn="ctr">
-                      <a:solidFill>
-                        <a:srgbClr val="334155"/>
-                      </a:solidFill>
-                      <a:prstDash val="solid"/>
-                      <a:round/>
-                      <a:headEnd type="none" w="med" len="med"/>
-                      <a:tailEnd type="none" w="med" len="med"/>
-                    </a:lnR>
-                    <a:lnT w="6350" cap="flat" cmpd="sng" algn="ctr">
-                      <a:solidFill>
-                        <a:srgbClr val="334155"/>
-                      </a:solidFill>
-                      <a:prstDash val="solid"/>
-                      <a:round/>
-                      <a:headEnd type="none" w="med" len="med"/>
-                      <a:tailEnd type="none" w="med" len="med"/>
-                    </a:lnT>
-                    <a:lnB w="6350" cap="flat" cmpd="sng" algn="ctr">
-                      <a:solidFill>
-                        <a:srgbClr val="334155"/>
-                      </a:solidFill>
-                      <a:prstDash val="solid"/>
-                      <a:round/>
-                      <a:headEnd type="none" w="med" len="med"/>
-                      <a:tailEnd type="none" w="med" len="med"/>
-                    </a:lnB>
-                    <a:solidFill>
-                      <a:srgbClr val="1A2332"/>
-                    </a:solidFill>
-                  </a:tcPr>
-                </a:tc>
-              </a:tr>
-              <a:tr h="457200">
-                <a:tc>
-                  <a:txBody>
-                    <a:bodyPr/>
-                    <a:lstStyle/>
-                    <a:p>
-                      <a:pPr indent="0" marL="0">
-                        <a:buNone/>
-                      </a:pPr>
-                      <a:r>
-                        <a:rPr lang="en-US" sz="1300" dirty="0">
-                          <a:solidFill>
-                            <a:srgbClr val="E8EEF7"/>
-                          </a:solidFill>
-                          <a:latin typeface="Calibri" pitchFamily="34" charset="0"/>
-                          <a:ea typeface="Calibri" pitchFamily="34" charset="-122"/>
-                          <a:cs typeface="Calibri" pitchFamily="34" charset="-120"/>
-                        </a:rPr>
-                        <a:t>1</a:t>
-                      </a:r>
-                      <a:endParaRPr lang="en-US" sz="1300" dirty="0">
-                        <a:latin typeface="Calibri" charset="0"/>
-                        <a:ea typeface="Calibri" charset="0"/>
-                        <a:cs typeface="Calibri" charset="0"/>
-                      </a:endParaRPr>
-                    </a:p>
-                  </a:txBody>
-                  <a:tcPr marL="91440" marR="91440" marT="45720" marB="45720" anchor="ctr">
-                    <a:lnL w="6350" cap="flat" cmpd="sng" algn="ctr">
-                      <a:solidFill>
-                        <a:srgbClr val="334155"/>
-                      </a:solidFill>
-                      <a:prstDash val="solid"/>
-                      <a:round/>
-                      <a:headEnd type="none" w="med" len="med"/>
-                      <a:tailEnd type="none" w="med" len="med"/>
-                    </a:lnL>
-                    <a:lnR w="6350" cap="flat" cmpd="sng" algn="ctr">
-                      <a:solidFill>
-                        <a:srgbClr val="334155"/>
-                      </a:solidFill>
-                      <a:prstDash val="solid"/>
-                      <a:round/>
-                      <a:headEnd type="none" w="med" len="med"/>
-                      <a:tailEnd type="none" w="med" len="med"/>
-                    </a:lnR>
-                    <a:lnT w="6350" cap="flat" cmpd="sng" algn="ctr">
-                      <a:solidFill>
-                        <a:srgbClr val="334155"/>
-                      </a:solidFill>
-                      <a:prstDash val="solid"/>
-                      <a:round/>
-                      <a:headEnd type="none" w="med" len="med"/>
-                      <a:tailEnd type="none" w="med" len="med"/>
-                    </a:lnT>
-                    <a:lnB w="6350" cap="flat" cmpd="sng" algn="ctr">
-                      <a:solidFill>
-                        <a:srgbClr val="334155"/>
-                      </a:solidFill>
-                      <a:prstDash val="solid"/>
-                      <a:round/>
-                      <a:headEnd type="none" w="med" len="med"/>
-                      <a:tailEnd type="none" w="med" len="med"/>
-                    </a:lnB>
-                    <a:solidFill>
-                      <a:srgbClr val="1A2332"/>
-                    </a:solidFill>
-                  </a:tcPr>
-                </a:tc>
-                <a:tc>
-                  <a:txBody>
-                    <a:bodyPr/>
-                    <a:lstStyle/>
-                    <a:p>
-                      <a:pPr indent="0" marL="0">
-                        <a:buNone/>
-                      </a:pPr>
-                      <a:r>
-                        <a:rPr lang="en-US" sz="1300" dirty="0">
-                          <a:solidFill>
-                            <a:srgbClr val="E8EEF7"/>
-                          </a:solidFill>
-                          <a:latin typeface="Calibri" pitchFamily="34" charset="0"/>
-                          <a:ea typeface="Calibri" pitchFamily="34" charset="-122"/>
-                          <a:cs typeface="Calibri" pitchFamily="34" charset="-120"/>
-                        </a:rPr>
-                        <a:t>≈ 0.33</a:t>
-                      </a:r>
-                      <a:endParaRPr lang="en-US" sz="1300" dirty="0">
-                        <a:latin typeface="Calibri" charset="0"/>
-                        <a:ea typeface="Calibri" charset="0"/>
-                        <a:cs typeface="Calibri" charset="0"/>
-                      </a:endParaRPr>
-                    </a:p>
-                  </a:txBody>
-                  <a:tcPr marL="91440" marR="91440" marT="45720" marB="45720" anchor="ctr">
-                    <a:lnL w="6350" cap="flat" cmpd="sng" algn="ctr">
-                      <a:solidFill>
-                        <a:srgbClr val="334155"/>
-                      </a:solidFill>
-                      <a:prstDash val="solid"/>
-                      <a:round/>
-                      <a:headEnd type="none" w="med" len="med"/>
-                      <a:tailEnd type="none" w="med" len="med"/>
-                    </a:lnL>
-                    <a:lnR w="6350" cap="flat" cmpd="sng" algn="ctr">
-                      <a:solidFill>
-                        <a:srgbClr val="334155"/>
-                      </a:solidFill>
-                      <a:prstDash val="solid"/>
-                      <a:round/>
-                      <a:headEnd type="none" w="med" len="med"/>
-                      <a:tailEnd type="none" w="med" len="med"/>
-                    </a:lnR>
-                    <a:lnT w="6350" cap="flat" cmpd="sng" algn="ctr">
-                      <a:solidFill>
-                        <a:srgbClr val="334155"/>
-                      </a:solidFill>
-                      <a:prstDash val="solid"/>
-                      <a:round/>
-                      <a:headEnd type="none" w="med" len="med"/>
-                      <a:tailEnd type="none" w="med" len="med"/>
-                    </a:lnT>
-                    <a:lnB w="6350" cap="flat" cmpd="sng" algn="ctr">
-                      <a:solidFill>
-                        <a:srgbClr val="334155"/>
-                      </a:solidFill>
-                      <a:prstDash val="solid"/>
-                      <a:round/>
-                      <a:headEnd type="none" w="med" len="med"/>
-                      <a:tailEnd type="none" w="med" len="med"/>
-                    </a:lnB>
-                    <a:solidFill>
-                      <a:srgbClr val="1A2332"/>
-                    </a:solidFill>
-                  </a:tcPr>
-                </a:tc>
-                <a:tc>
-                  <a:txBody>
-                    <a:bodyPr/>
-                    <a:lstStyle/>
-                    <a:p>
-                      <a:pPr indent="0" marL="0">
-                        <a:buNone/>
-                      </a:pPr>
-                      <a:r>
-                        <a:rPr lang="en-US" sz="1300" dirty="0">
-                          <a:solidFill>
-                            <a:srgbClr val="E8EEF7"/>
-                          </a:solidFill>
-                          <a:latin typeface="Calibri" pitchFamily="34" charset="0"/>
-                          <a:ea typeface="Calibri" pitchFamily="34" charset="-122"/>
-                          <a:cs typeface="Calibri" pitchFamily="34" charset="-120"/>
-                        </a:rPr>
-                        <a:t>Lowest eligible</a:t>
-                      </a:r>
-                      <a:endParaRPr lang="en-US" sz="1300" dirty="0">
-                        <a:latin typeface="Calibri" charset="0"/>
-                        <a:ea typeface="Calibri" charset="0"/>
-                        <a:cs typeface="Calibri" charset="0"/>
-                      </a:endParaRPr>
-                    </a:p>
-                  </a:txBody>
-                  <a:tcPr marL="91440" marR="91440" marT="45720" marB="45720" anchor="ctr">
-                    <a:lnL w="6350" cap="flat" cmpd="sng" algn="ctr">
-                      <a:solidFill>
-                        <a:srgbClr val="334155"/>
-                      </a:solidFill>
-                      <a:prstDash val="solid"/>
-                      <a:round/>
-                      <a:headEnd type="none" w="med" len="med"/>
-                      <a:tailEnd type="none" w="med" len="med"/>
-                    </a:lnL>
-                    <a:lnR w="6350" cap="flat" cmpd="sng" algn="ctr">
-                      <a:solidFill>
-                        <a:srgbClr val="334155"/>
-                      </a:solidFill>
-                      <a:prstDash val="solid"/>
-                      <a:round/>
-                      <a:headEnd type="none" w="med" len="med"/>
-                      <a:tailEnd type="none" w="med" len="med"/>
-                    </a:lnR>
-                    <a:lnT w="6350" cap="flat" cmpd="sng" algn="ctr">
-                      <a:solidFill>
-                        <a:srgbClr val="334155"/>
-                      </a:solidFill>
-                      <a:prstDash val="solid"/>
-                      <a:round/>
-                      <a:headEnd type="none" w="med" len="med"/>
-                      <a:tailEnd type="none" w="med" len="med"/>
-                    </a:lnT>
-                    <a:lnB w="6350" cap="flat" cmpd="sng" algn="ctr">
-                      <a:solidFill>
-                        <a:srgbClr val="334155"/>
-                      </a:solidFill>
-                      <a:prstDash val="solid"/>
-                      <a:round/>
-                      <a:headEnd type="none" w="med" len="med"/>
-                      <a:tailEnd type="none" w="med" len="med"/>
-                    </a:lnB>
-                    <a:solidFill>
-                      <a:srgbClr val="1A2332"/>
-                    </a:solidFill>
-                  </a:tcPr>
-                </a:tc>
-              </a:tr>
-              <a:tr h="457200">
-                <a:tc>
-                  <a:txBody>
-                    <a:bodyPr/>
-                    <a:lstStyle/>
-                    <a:p>
-                      <a:pPr indent="0" marL="0">
-                        <a:buNone/>
-                      </a:pPr>
-                      <a:r>
-                        <a:rPr lang="en-US" sz="1300" dirty="0">
-                          <a:solidFill>
-                            <a:srgbClr val="E8EEF7"/>
-                          </a:solidFill>
-                          <a:latin typeface="Calibri" pitchFamily="34" charset="0"/>
-                          <a:ea typeface="Calibri" pitchFamily="34" charset="-122"/>
-                          <a:cs typeface="Calibri" pitchFamily="34" charset="-120"/>
-                        </a:rPr>
-                        <a:t>0</a:t>
-                      </a:r>
-                      <a:endParaRPr lang="en-US" sz="1300" dirty="0">
-                        <a:latin typeface="Calibri" charset="0"/>
-                        <a:ea typeface="Calibri" charset="0"/>
-                        <a:cs typeface="Calibri" charset="0"/>
-                      </a:endParaRPr>
-                    </a:p>
-                  </a:txBody>
-                  <a:tcPr marL="91440" marR="91440" marT="45720" marB="45720" anchor="ctr">
-                    <a:lnL w="6350" cap="flat" cmpd="sng" algn="ctr">
-                      <a:solidFill>
-                        <a:srgbClr val="334155"/>
-                      </a:solidFill>
-                      <a:prstDash val="solid"/>
-                      <a:round/>
-                      <a:headEnd type="none" w="med" len="med"/>
-                      <a:tailEnd type="none" w="med" len="med"/>
-                    </a:lnL>
-                    <a:lnR w="6350" cap="flat" cmpd="sng" algn="ctr">
-                      <a:solidFill>
-                        <a:srgbClr val="334155"/>
-                      </a:solidFill>
-                      <a:prstDash val="solid"/>
-                      <a:round/>
-                      <a:headEnd type="none" w="med" len="med"/>
-                      <a:tailEnd type="none" w="med" len="med"/>
-                    </a:lnR>
-                    <a:lnT w="6350" cap="flat" cmpd="sng" algn="ctr">
-                      <a:solidFill>
-                        <a:srgbClr val="334155"/>
-                      </a:solidFill>
-                      <a:prstDash val="solid"/>
-                      <a:round/>
-                      <a:headEnd type="none" w="med" len="med"/>
-                      <a:tailEnd type="none" w="med" len="med"/>
-                    </a:lnT>
-                    <a:lnB w="6350" cap="flat" cmpd="sng" algn="ctr">
-                      <a:solidFill>
-                        <a:srgbClr val="334155"/>
-                      </a:solidFill>
-                      <a:prstDash val="solid"/>
-                      <a:round/>
-                      <a:headEnd type="none" w="med" len="med"/>
-                      <a:tailEnd type="none" w="med" len="med"/>
-                    </a:lnB>
-                    <a:solidFill>
-                      <a:srgbClr val="1A2332"/>
-                    </a:solidFill>
-                  </a:tcPr>
-                </a:tc>
-                <a:tc>
-                  <a:txBody>
-                    <a:bodyPr/>
-                    <a:lstStyle/>
-                    <a:p>
-                      <a:pPr indent="0" marL="0">
-                        <a:buNone/>
-                      </a:pPr>
-                      <a:r>
-                        <a:rPr lang="en-US" sz="1300" dirty="0">
-                          <a:solidFill>
-                            <a:srgbClr val="E8EEF7"/>
-                          </a:solidFill>
-                          <a:latin typeface="Calibri" pitchFamily="34" charset="0"/>
-                          <a:ea typeface="Calibri" pitchFamily="34" charset="-122"/>
-                          <a:cs typeface="Calibri" pitchFamily="34" charset="-120"/>
-                        </a:rPr>
-                        <a:t>0.00</a:t>
-                      </a:r>
-                      <a:endParaRPr lang="en-US" sz="1300" dirty="0">
-                        <a:latin typeface="Calibri" charset="0"/>
-                        <a:ea typeface="Calibri" charset="0"/>
-                        <a:cs typeface="Calibri" charset="0"/>
-                      </a:endParaRPr>
-                    </a:p>
-                  </a:txBody>
-                  <a:tcPr marL="91440" marR="91440" marT="45720" marB="45720" anchor="ctr">
-                    <a:lnL w="6350" cap="flat" cmpd="sng" algn="ctr">
-                      <a:solidFill>
-                        <a:srgbClr val="334155"/>
-                      </a:solidFill>
-                      <a:prstDash val="solid"/>
-                      <a:round/>
-                      <a:headEnd type="none" w="med" len="med"/>
-                      <a:tailEnd type="none" w="med" len="med"/>
-                    </a:lnL>
-                    <a:lnR w="6350" cap="flat" cmpd="sng" algn="ctr">
-                      <a:solidFill>
-                        <a:srgbClr val="334155"/>
-                      </a:solidFill>
-                      <a:prstDash val="solid"/>
-                      <a:round/>
-                      <a:headEnd type="none" w="med" len="med"/>
-                      <a:tailEnd type="none" w="med" len="med"/>
-                    </a:lnR>
-                    <a:lnT w="6350" cap="flat" cmpd="sng" algn="ctr">
-                      <a:solidFill>
-                        <a:srgbClr val="334155"/>
-                      </a:solidFill>
-                      <a:prstDash val="solid"/>
-                      <a:round/>
-                      <a:headEnd type="none" w="med" len="med"/>
-                      <a:tailEnd type="none" w="med" len="med"/>
-                    </a:lnT>
-                    <a:lnB w="6350" cap="flat" cmpd="sng" algn="ctr">
-                      <a:solidFill>
-                        <a:srgbClr val="334155"/>
-                      </a:solidFill>
-                      <a:prstDash val="solid"/>
-                      <a:round/>
-                      <a:headEnd type="none" w="med" len="med"/>
-                      <a:tailEnd type="none" w="med" len="med"/>
-                    </a:lnB>
-                    <a:solidFill>
-                      <a:srgbClr val="1A2332"/>
-                    </a:solidFill>
-                  </a:tcPr>
-                </a:tc>
-                <a:tc>
-                  <a:txBody>
-                    <a:bodyPr/>
-                    <a:lstStyle/>
-                    <a:p>
-                      <a:pPr indent="0" marL="0">
-                        <a:buNone/>
-                      </a:pPr>
-                      <a:r>
-                        <a:rPr lang="en-US" sz="1300" dirty="0">
-                          <a:solidFill>
-                            <a:srgbClr val="E8EEF7"/>
-                          </a:solidFill>
-                          <a:latin typeface="Calibri" pitchFamily="34" charset="0"/>
-                          <a:ea typeface="Calibri" pitchFamily="34" charset="-122"/>
-                          <a:cs typeface="Calibri" pitchFamily="34" charset="-120"/>
-                        </a:rPr>
-                        <a:t>Never matched</a:t>
-                      </a:r>
-                      <a:endParaRPr lang="en-US" sz="1300" dirty="0">
-                        <a:latin typeface="Calibri" charset="0"/>
-                        <a:ea typeface="Calibri" charset="0"/>
-                        <a:cs typeface="Calibri" charset="0"/>
-                      </a:endParaRPr>
-                    </a:p>
-                  </a:txBody>
-                  <a:tcPr marL="91440" marR="91440" marT="45720" marB="45720" anchor="ctr">
-                    <a:lnL w="6350" cap="flat" cmpd="sng" algn="ctr">
-                      <a:solidFill>
-                        <a:srgbClr val="334155"/>
-                      </a:solidFill>
-                      <a:prstDash val="solid"/>
-                      <a:round/>
-                      <a:headEnd type="none" w="med" len="med"/>
-                      <a:tailEnd type="none" w="med" len="med"/>
-                    </a:lnL>
-                    <a:lnR w="6350" cap="flat" cmpd="sng" algn="ctr">
-                      <a:solidFill>
-                        <a:srgbClr val="334155"/>
-                      </a:solidFill>
-                      <a:prstDash val="solid"/>
-                      <a:round/>
-                      <a:headEnd type="none" w="med" len="med"/>
-                      <a:tailEnd type="none" w="med" len="med"/>
-                    </a:lnR>
-                    <a:lnT w="6350" cap="flat" cmpd="sng" algn="ctr">
-                      <a:solidFill>
-                        <a:srgbClr val="334155"/>
-                      </a:solidFill>
-                      <a:prstDash val="solid"/>
-                      <a:round/>
-                      <a:headEnd type="none" w="med" len="med"/>
-                      <a:tailEnd type="none" w="med" len="med"/>
-                    </a:lnT>
-                    <a:lnB w="6350" cap="flat" cmpd="sng" algn="ctr">
-                      <a:solidFill>
-                        <a:srgbClr val="334155"/>
-                      </a:solidFill>
-                      <a:prstDash val="solid"/>
-                      <a:round/>
-                      <a:headEnd type="none" w="med" len="med"/>
-                      <a:tailEnd type="none" w="med" len="med"/>
-                    </a:lnB>
-                    <a:solidFill>
-                      <a:srgbClr val="1A2332"/>
-                    </a:solidFill>
-                  </a:tcPr>
-                </a:tc>
-              </a:tr>
-            </a:tbl>
-          </a:graphicData>
-        </a:graphic>
-      </p:graphicFrame>
-      <p:sp>
-        <p:nvSpPr>
-          <p:cNvPr id="6" name="Text 3"/>
-          <p:cNvSpPr/>
-          <p:nvPr/>
-        </p:nvSpPr>
-        <p:spPr>
-          <a:xfrm>
-            <a:off x="5669280" y="1554480"/>
-            <a:ext cx="3017520" cy="2560320"/>
+              <a:t>const at = new AccessToken(apiKey, apiSecret, {</a:t>
+            </a:r>
+            <a:endParaRPr lang="en-US" sz="1000" dirty="0"/>
+          </a:p>
+          <a:p>
+            <a:pPr indent="0" marL="0">
+              <a:buNone/>
+            </a:pPr>
+            <a:r>
+              <a:rPr lang="en-US" sz="1000" dirty="0">
+                <a:solidFill>
+                  <a:srgbClr val="C8D6E5"/>
+                </a:solidFill>
+                <a:latin typeface="Consolas" pitchFamily="34" charset="0"/>
+                <a:ea typeface="Consolas" pitchFamily="34" charset="-122"/>
+                <a:cs typeface="Consolas" pitchFamily="34" charset="-120"/>
+              </a:rPr>
+              <a:t>  identity: playerId,</a:t>
+            </a:r>
+            <a:endParaRPr lang="en-US" sz="1000" dirty="0"/>
+          </a:p>
+          <a:p>
+            <a:pPr indent="0" marL="0">
+              <a:buNone/>
+            </a:pPr>
+            <a:r>
+              <a:rPr lang="en-US" sz="1000" dirty="0">
+                <a:solidFill>
+                  <a:srgbClr val="C8D6E5"/>
+                </a:solidFill>
+                <a:latin typeface="Consolas" pitchFamily="34" charset="0"/>
+                <a:ea typeface="Consolas" pitchFamily="34" charset="-122"/>
+                <a:cs typeface="Consolas" pitchFamily="34" charset="-120"/>
+              </a:rPr>
+              <a:t>  ttl: '2h',</a:t>
+            </a:r>
+            <a:endParaRPr lang="en-US" sz="1000" dirty="0"/>
+          </a:p>
+          <a:p>
+            <a:pPr indent="0" marL="0">
+              <a:buNone/>
+            </a:pPr>
+            <a:r>
+              <a:rPr lang="en-US" sz="1000" dirty="0">
+                <a:solidFill>
+                  <a:srgbClr val="C8D6E5"/>
+                </a:solidFill>
+                <a:latin typeface="Consolas" pitchFamily="34" charset="0"/>
+                <a:ea typeface="Consolas" pitchFamily="34" charset="-122"/>
+                <a:cs typeface="Consolas" pitchFamily="34" charset="-120"/>
+              </a:rPr>
+              <a:t>});</a:t>
+            </a:r>
+            <a:endParaRPr lang="en-US" sz="1000" dirty="0"/>
+          </a:p>
+          <a:p>
+            <a:pPr indent="0" marL="0">
+              <a:buNone/>
+            </a:pPr>
+            <a:r>
+              <a:rPr lang="en-US" sz="1000" dirty="0">
+                <a:solidFill>
+                  <a:srgbClr val="C8D6E5"/>
+                </a:solidFill>
+                <a:latin typeface="Consolas" pitchFamily="34" charset="0"/>
+                <a:ea typeface="Consolas" pitchFamily="34" charset="-122"/>
+                <a:cs typeface="Consolas" pitchFamily="34" charset="-120"/>
+              </a:rPr>
+              <a:t>at.addGrant({</a:t>
+            </a:r>
+            <a:endParaRPr lang="en-US" sz="1000" dirty="0"/>
+          </a:p>
+          <a:p>
+            <a:pPr indent="0" marL="0">
+              <a:buNone/>
+            </a:pPr>
+            <a:r>
+              <a:rPr lang="en-US" sz="1000" dirty="0">
+                <a:solidFill>
+                  <a:srgbClr val="C8D6E5"/>
+                </a:solidFill>
+                <a:latin typeface="Consolas" pitchFamily="34" charset="0"/>
+                <a:ea typeface="Consolas" pitchFamily="34" charset="-122"/>
+                <a:cs typeface="Consolas" pitchFamily="34" charset="-120"/>
+              </a:rPr>
+              <a:t>  roomJoin: true,</a:t>
+            </a:r>
+            <a:endParaRPr lang="en-US" sz="1000" dirty="0"/>
+          </a:p>
+          <a:p>
+            <a:pPr indent="0" marL="0">
+              <a:buNone/>
+            </a:pPr>
+            <a:r>
+              <a:rPr lang="en-US" sz="1000" dirty="0">
+                <a:solidFill>
+                  <a:srgbClr val="C8D6E5"/>
+                </a:solidFill>
+                <a:latin typeface="Consolas" pitchFamily="34" charset="0"/>
+                <a:ea typeface="Consolas" pitchFamily="34" charset="-122"/>
+                <a:cs typeface="Consolas" pitchFamily="34" charset="-120"/>
+              </a:rPr>
+              <a:t>  room: `match-${matchId}`,</a:t>
+            </a:r>
+            <a:endParaRPr lang="en-US" sz="1000" dirty="0"/>
+          </a:p>
+          <a:p>
+            <a:pPr indent="0" marL="0">
+              <a:buNone/>
+            </a:pPr>
+            <a:r>
+              <a:rPr lang="en-US" sz="1000" dirty="0">
+                <a:solidFill>
+                  <a:srgbClr val="C8D6E5"/>
+                </a:solidFill>
+                <a:latin typeface="Consolas" pitchFamily="34" charset="0"/>
+                <a:ea typeface="Consolas" pitchFamily="34" charset="-122"/>
+                <a:cs typeface="Consolas" pitchFamily="34" charset="-120"/>
+              </a:rPr>
+              <a:t>  canPublish: true,</a:t>
+            </a:r>
+            <a:endParaRPr lang="en-US" sz="1000" dirty="0"/>
+          </a:p>
+          <a:p>
+            <a:pPr indent="0" marL="0">
+              <a:buNone/>
+            </a:pPr>
+            <a:r>
+              <a:rPr lang="en-US" sz="1000" dirty="0">
+                <a:solidFill>
+                  <a:srgbClr val="C8D6E5"/>
+                </a:solidFill>
+                <a:latin typeface="Consolas" pitchFamily="34" charset="0"/>
+                <a:ea typeface="Consolas" pitchFamily="34" charset="-122"/>
+                <a:cs typeface="Consolas" pitchFamily="34" charset="-120"/>
+              </a:rPr>
+              <a:t>  canSubscribe: true,</a:t>
+            </a:r>
+            <a:endParaRPr lang="en-US" sz="1000" dirty="0"/>
+          </a:p>
+          <a:p>
+            <a:pPr indent="0" marL="0">
+              <a:buNone/>
+            </a:pPr>
+            <a:r>
+              <a:rPr lang="en-US" sz="1000" dirty="0">
+                <a:solidFill>
+                  <a:srgbClr val="C8D6E5"/>
+                </a:solidFill>
+                <a:latin typeface="Consolas" pitchFamily="34" charset="0"/>
+                <a:ea typeface="Consolas" pitchFamily="34" charset="-122"/>
+                <a:cs typeface="Consolas" pitchFamily="34" charset="-120"/>
+              </a:rPr>
+              <a:t>  canPublishSources: [MICROPHONE],</a:t>
+            </a:r>
+            <a:endParaRPr lang="en-US" sz="1000" dirty="0"/>
+          </a:p>
+          <a:p>
+            <a:pPr indent="0" marL="0">
+              <a:buNone/>
+            </a:pPr>
+            <a:r>
+              <a:rPr lang="en-US" sz="1000" dirty="0">
+                <a:solidFill>
+                  <a:srgbClr val="C8D6E5"/>
+                </a:solidFill>
+                <a:latin typeface="Consolas" pitchFamily="34" charset="0"/>
+                <a:ea typeface="Consolas" pitchFamily="34" charset="-122"/>
+                <a:cs typeface="Consolas" pitchFamily="34" charset="-120"/>
+              </a:rPr>
+              <a:t>  canPublishData: false,</a:t>
+            </a:r>
+            <a:endParaRPr lang="en-US" sz="1000" dirty="0"/>
+          </a:p>
+          <a:p>
+            <a:pPr indent="0" marL="0">
+              <a:buNone/>
+            </a:pPr>
+            <a:r>
+              <a:rPr lang="en-US" sz="1000" dirty="0">
+                <a:solidFill>
+                  <a:srgbClr val="C8D6E5"/>
+                </a:solidFill>
+                <a:latin typeface="Consolas" pitchFamily="34" charset="0"/>
+                <a:ea typeface="Consolas" pitchFamily="34" charset="-122"/>
+                <a:cs typeface="Consolas" pitchFamily="34" charset="-120"/>
+              </a:rPr>
+              <a:t>});</a:t>
+            </a:r>
+            <a:endParaRPr lang="en-US" sz="1000" dirty="0"/>
+          </a:p>
+          <a:p>
+            <a:pPr indent="0" marL="0">
+              <a:buNone/>
+            </a:pPr>
+            <a:r>
+              <a:rPr lang="en-US" sz="1000" dirty="0">
+                <a:solidFill>
+                  <a:srgbClr val="C8D6E5"/>
+                </a:solidFill>
+                <a:latin typeface="Consolas" pitchFamily="34" charset="0"/>
+                <a:ea typeface="Consolas" pitchFamily="34" charset="-122"/>
+                <a:cs typeface="Consolas" pitchFamily="34" charset="-120"/>
+              </a:rPr>
+              <a:t>const token = await at.toJwt();</a:t>
+            </a:r>
+            <a:endParaRPr lang="en-US" sz="1000" dirty="0"/>
+          </a:p>
+          <a:p>
+            <a:pPr indent="0" marL="0">
+              <a:buNone/>
+            </a:pPr>
+            <a:r>
+              <a:rPr lang="en-US" sz="1000" dirty="0">
+                <a:solidFill>
+                  <a:srgbClr val="C8D6E5"/>
+                </a:solidFill>
+                <a:latin typeface="Consolas" pitchFamily="34" charset="0"/>
+                <a:ea typeface="Consolas" pitchFamily="34" charset="-122"/>
+                <a:cs typeface="Consolas" pitchFamily="34" charset="-120"/>
+              </a:rPr>
+              <a:t>return { token, serverUrl };</a:t>
+            </a:r>
+            <a:endParaRPr lang="en-US" sz="1000" dirty="0"/>
+          </a:p>
+        </p:txBody>
+      </p:sp>
+      <p:sp>
+        <p:nvSpPr>
+          <p:cNvPr id="7" name="Text 5"/>
+          <p:cNvSpPr/>
+          <p:nvPr/>
+        </p:nvSpPr>
+        <p:spPr>
+          <a:xfrm>
+            <a:off x="4754880" y="868680"/>
+            <a:ext cx="4114800" cy="256032"/>
           </a:xfrm>
           <a:prstGeom prst="rect">
             <a:avLst/>
@@ -3991,83 +3214,54 @@
               <a:buNone/>
             </a:pPr>
             <a:r>
-              <a:rPr lang="en-US" sz="1300" b="1" dirty="0">
-                <a:solidFill>
-                  <a:srgbClr val="E8EEF7"/>
-                </a:solidFill>
-              </a:rPr>
-              <a:t>Implementation choice</a:t>
-            </a:r>
-            <a:endParaRPr lang="en-US" sz="1300" dirty="0"/>
-          </a:p>
-          <a:p>
-            <a:pPr indent="0" marL="0">
-              <a:buNone/>
-            </a:pPr>
-            <a:r>
-              <a:rPr lang="en-US" sz="1300" dirty="0">
-                <a:solidFill>
-                  <a:srgbClr val="E8EEF7"/>
-                </a:solidFill>
-              </a:rPr>
-              <a:t>Set intersection only — no ML, no vector DB.</a:t>
-            </a:r>
-            <a:endParaRPr lang="en-US" sz="1300" dirty="0"/>
-          </a:p>
-          <a:p>
-            <a:pPr indent="0" marL="0">
-              <a:buNone/>
-            </a:pPr>
-            <a:r>
-              <a:rPr lang="en-US" sz="1300" dirty="0">
-                <a:solidFill>
-                  <a:srgbClr val="E8EEF7"/>
-                </a:solidFill>
-              </a:rPr>
-              <a:t>Waiting player = P1; joiner = P2.</a:t>
-            </a:r>
-            <a:endParaRPr lang="en-US" sz="1300" dirty="0"/>
-          </a:p>
-          <a:p>
-            <a:pPr indent="0" marL="0">
-              <a:buNone/>
-            </a:pPr>
-            <a:r>
-              <a:rPr lang="en-US" sz="1300" dirty="0">
-                <a:solidFill>
-                  <a:srgbClr val="E8EEF7"/>
-                </a:solidFill>
-              </a:rPr>
-              <a:t>Tie-break: earliest joined_at.</a:t>
-            </a:r>
-            <a:endParaRPr lang="en-US" sz="1300" dirty="0"/>
-          </a:p>
-          <a:p>
-            <a:pPr indent="0" marL="0">
-              <a:buNone/>
-            </a:pPr>
-            <a:r>
-              <a:rPr lang="en-US" sz="1300" dirty="0">
-                <a:solidFill>
-                  <a:srgbClr val="E8EEF7"/>
-                </a:solidFill>
-              </a:rPr>
-              <a:t>Excerpt: calculateInterestOverlap / selectBestCandidate</a:t>
-            </a:r>
-            <a:endParaRPr lang="en-US" sz="1300" dirty="0"/>
-          </a:p>
-        </p:txBody>
-      </p:sp>
-      <p:sp>
-        <p:nvSpPr>
-          <p:cNvPr id="7" name="Text 4"/>
-          <p:cNvSpPr/>
-          <p:nvPr/>
-        </p:nvSpPr>
-        <p:spPr>
-          <a:xfrm>
-            <a:off x="457200" y="4828032"/>
-            <a:ext cx="6583680" cy="201168"/>
+              <a:rPr lang="en-US" sz="1100" b="1" dirty="0">
+                <a:solidFill>
+                  <a:srgbClr val="3ECF8E"/>
+                </a:solidFill>
+              </a:rPr>
+              <a:t>MatchAudio.jsx — connect lifecycle</a:t>
+            </a:r>
+            <a:endParaRPr lang="en-US" sz="1100" dirty="0"/>
+          </a:p>
+        </p:txBody>
+      </p:sp>
+      <p:sp>
+        <p:nvSpPr>
+          <p:cNvPr id="8" name="Shape 6"/>
+          <p:cNvSpPr/>
+          <p:nvPr/>
+        </p:nvSpPr>
+        <p:spPr>
+          <a:xfrm>
+            <a:off x="4709160" y="1143000"/>
+            <a:ext cx="4160520" cy="3246120"/>
+          </a:xfrm>
+          <a:prstGeom prst="roundRect">
+            <a:avLst>
+              <a:gd name="adj" fmla="val 1690"/>
+            </a:avLst>
+          </a:prstGeom>
+          <a:solidFill>
+            <a:srgbClr val="121A24"/>
+          </a:solidFill>
+          <a:ln w="12700">
+            <a:solidFill>
+              <a:srgbClr val="334155"/>
+            </a:solidFill>
+            <a:prstDash val="solid"/>
+          </a:ln>
+        </p:spPr>
+      </p:sp>
+      <p:sp>
+        <p:nvSpPr>
+          <p:cNvPr id="9" name="Text 7"/>
+          <p:cNvSpPr/>
+          <p:nvPr/>
+        </p:nvSpPr>
+        <p:spPr>
+          <a:xfrm>
+            <a:off x="4846320" y="1234440"/>
+            <a:ext cx="3886200" cy="3017520"/>
           </a:xfrm>
           <a:prstGeom prst="rect">
             <a:avLst/>
@@ -4076,6 +3270,238 @@
           <a:ln/>
         </p:spPr>
         <p:txBody>
+          <a:bodyPr wrap="square" lIns="0" tIns="0" rIns="0" bIns="0" rtlCol="0" anchor="t"/>
+          <a:lstStyle/>
+          <a:p>
+            <a:pPr indent="0" marL="0">
+              <a:buNone/>
+            </a:pPr>
+            <a:r>
+              <a:rPr lang="en-US" sz="1000" dirty="0">
+                <a:solidFill>
+                  <a:srgbClr val="C8D6E5"/>
+                </a:solidFill>
+                <a:latin typeface="Consolas" pitchFamily="34" charset="0"/>
+                <a:ea typeface="Consolas" pitchFamily="34" charset="-122"/>
+                <a:cs typeface="Consolas" pitchFamily="34" charset="-120"/>
+              </a:rPr>
+              <a:t>// CONNECTING → getAudioToken → Room</a:t>
+            </a:r>
+            <a:endParaRPr lang="en-US" sz="1000" dirty="0"/>
+          </a:p>
+          <a:p>
+            <a:pPr indent="0" marL="0">
+              <a:buNone/>
+            </a:pPr>
+            <a:r>
+              <a:rPr lang="en-US" sz="1000" dirty="0">
+                <a:solidFill>
+                  <a:srgbClr val="C8D6E5"/>
+                </a:solidFill>
+                <a:latin typeface="Consolas" pitchFamily="34" charset="0"/>
+                <a:ea typeface="Consolas" pitchFamily="34" charset="-122"/>
+                <a:cs typeface="Consolas" pitchFamily="34" charset="-120"/>
+              </a:rPr>
+              <a:t>const { token, serverUrl } =</a:t>
+            </a:r>
+            <a:endParaRPr lang="en-US" sz="1000" dirty="0"/>
+          </a:p>
+          <a:p>
+            <a:pPr indent="0" marL="0">
+              <a:buNone/>
+            </a:pPr>
+            <a:r>
+              <a:rPr lang="en-US" sz="1000" dirty="0">
+                <a:solidFill>
+                  <a:srgbClr val="C8D6E5"/>
+                </a:solidFill>
+                <a:latin typeface="Consolas" pitchFamily="34" charset="0"/>
+                <a:ea typeface="Consolas" pitchFamily="34" charset="-122"/>
+                <a:cs typeface="Consolas" pitchFamily="34" charset="-120"/>
+              </a:rPr>
+              <a:t>  await getAudioToken(matchId);</a:t>
+            </a:r>
+            <a:endParaRPr lang="en-US" sz="1000" dirty="0"/>
+          </a:p>
+          <a:p>
+            <a:pPr indent="0" marL="0">
+              <a:buNone/>
+            </a:pPr>
+            <a:r>
+              <a:rPr lang="en-US" sz="1000" dirty="0">
+                <a:solidFill>
+                  <a:srgbClr val="C8D6E5"/>
+                </a:solidFill>
+                <a:latin typeface="Consolas" pitchFamily="34" charset="0"/>
+                <a:ea typeface="Consolas" pitchFamily="34" charset="-122"/>
+                <a:cs typeface="Consolas" pitchFamily="34" charset="-120"/>
+              </a:rPr>
+              <a:t>room = new Room({ ... });</a:t>
+            </a:r>
+            <a:endParaRPr lang="en-US" sz="1000" dirty="0"/>
+          </a:p>
+          <a:p>
+            <a:pPr indent="0" marL="0">
+              <a:buNone/>
+            </a:pPr>
+            <a:r>
+              <a:rPr lang="en-US" sz="1000" dirty="0">
+                <a:solidFill>
+                  <a:srgbClr val="C8D6E5"/>
+                </a:solidFill>
+                <a:latin typeface="Consolas" pitchFamily="34" charset="0"/>
+                <a:ea typeface="Consolas" pitchFamily="34" charset="-122"/>
+                <a:cs typeface="Consolas" pitchFamily="34" charset="-120"/>
+              </a:rPr>
+              <a:t>room.on(TrackSubscribed, attachRemote);</a:t>
+            </a:r>
+            <a:endParaRPr lang="en-US" sz="1000" dirty="0"/>
+          </a:p>
+          <a:p>
+            <a:pPr indent="0" marL="0">
+              <a:buNone/>
+            </a:pPr>
+            <a:r>
+              <a:rPr lang="en-US" sz="1000" dirty="0">
+                <a:solidFill>
+                  <a:srgbClr val="C8D6E5"/>
+                </a:solidFill>
+                <a:latin typeface="Consolas" pitchFamily="34" charset="0"/>
+                <a:ea typeface="Consolas" pitchFamily="34" charset="-122"/>
+                <a:cs typeface="Consolas" pitchFamily="34" charset="-120"/>
+              </a:rPr>
+              <a:t>await room.connect(serverUrl, token);</a:t>
+            </a:r>
+            <a:endParaRPr lang="en-US" sz="1000" dirty="0"/>
+          </a:p>
+          <a:p>
+            <a:pPr indent="0" marL="0">
+              <a:buNone/>
+            </a:pPr>
+            <a:r>
+              <a:rPr lang="en-US" sz="1000" dirty="0">
+                <a:solidFill>
+                  <a:srgbClr val="C8D6E5"/>
+                </a:solidFill>
+                <a:latin typeface="Consolas" pitchFamily="34" charset="0"/>
+                <a:ea typeface="Consolas" pitchFamily="34" charset="-122"/>
+                <a:cs typeface="Consolas" pitchFamily="34" charset="-120"/>
+              </a:rPr>
+              <a:t>await room.localParticipant</a:t>
+            </a:r>
+            <a:endParaRPr lang="en-US" sz="1000" dirty="0"/>
+          </a:p>
+          <a:p>
+            <a:pPr indent="0" marL="0">
+              <a:buNone/>
+            </a:pPr>
+            <a:r>
+              <a:rPr lang="en-US" sz="1000" dirty="0">
+                <a:solidFill>
+                  <a:srgbClr val="C8D6E5"/>
+                </a:solidFill>
+                <a:latin typeface="Consolas" pitchFamily="34" charset="0"/>
+                <a:ea typeface="Consolas" pitchFamily="34" charset="-122"/>
+                <a:cs typeface="Consolas" pitchFamily="34" charset="-120"/>
+              </a:rPr>
+              <a:t>  .setMicrophoneEnabled(true);</a:t>
+            </a:r>
+            <a:endParaRPr lang="en-US" sz="1000" dirty="0"/>
+          </a:p>
+          <a:p>
+            <a:pPr indent="0" marL="0">
+              <a:buNone/>
+            </a:pPr>
+            <a:r>
+              <a:rPr lang="en-US" sz="1000" dirty="0">
+                <a:solidFill>
+                  <a:srgbClr val="C8D6E5"/>
+                </a:solidFill>
+                <a:latin typeface="Consolas" pitchFamily="34" charset="0"/>
+                <a:ea typeface="Consolas" pitchFamily="34" charset="-122"/>
+                <a:cs typeface="Consolas" pitchFamily="34" charset="-120"/>
+              </a:rPr>
+              <a:t>setAudioState('CONNECTED');</a:t>
+            </a:r>
+            <a:endParaRPr lang="en-US" sz="1000" dirty="0"/>
+          </a:p>
+          <a:p>
+            <a:pPr indent="0" marL="0">
+              <a:buNone/>
+            </a:pPr>
+            <a:endParaRPr lang="en-US" sz="1000" dirty="0"/>
+          </a:p>
+          <a:p>
+            <a:pPr indent="0" marL="0">
+              <a:buNone/>
+            </a:pPr>
+            <a:r>
+              <a:rPr lang="en-US" sz="1000" dirty="0">
+                <a:solidFill>
+                  <a:srgbClr val="C8D6E5"/>
+                </a:solidFill>
+                <a:latin typeface="Consolas" pitchFamily="34" charset="0"/>
+                <a:ea typeface="Consolas" pitchFamily="34" charset="-122"/>
+                <a:cs typeface="Consolas" pitchFamily="34" charset="-120"/>
+              </a:rPr>
+              <a:t>// cleanup on unmount only:</a:t>
+            </a:r>
+            <a:endParaRPr lang="en-US" sz="1000" dirty="0"/>
+          </a:p>
+          <a:p>
+            <a:pPr indent="0" marL="0">
+              <a:buNone/>
+            </a:pPr>
+            <a:r>
+              <a:rPr lang="en-US" sz="1000" dirty="0">
+                <a:solidFill>
+                  <a:srgbClr val="C8D6E5"/>
+                </a:solidFill>
+                <a:latin typeface="Consolas" pitchFamily="34" charset="0"/>
+                <a:ea typeface="Consolas" pitchFamily="34" charset="-122"/>
+                <a:cs typeface="Consolas" pitchFamily="34" charset="-120"/>
+              </a:rPr>
+              <a:t>// mic off, disconnect, remove listeners</a:t>
+            </a:r>
+            <a:endParaRPr lang="en-US" sz="1000" dirty="0"/>
+          </a:p>
+          <a:p>
+            <a:pPr indent="0" marL="0">
+              <a:buNone/>
+            </a:pPr>
+            <a:r>
+              <a:rPr lang="en-US" sz="1000" dirty="0">
+                <a:solidFill>
+                  <a:srgbClr val="C8D6E5"/>
+                </a:solidFill>
+                <a:latin typeface="Consolas" pitchFamily="34" charset="0"/>
+                <a:ea typeface="Consolas" pitchFamily="34" charset="-122"/>
+                <a:cs typeface="Consolas" pitchFamily="34" charset="-120"/>
+              </a:rPr>
+              <a:t>// deps: [matchId] — not phase/question</a:t>
+            </a:r>
+            <a:endParaRPr lang="en-US" sz="1000" dirty="0"/>
+          </a:p>
+        </p:txBody>
+      </p:sp>
+      <p:sp>
+        <p:nvSpPr>
+          <p:cNvPr id="10" name="Text 8"/>
+          <p:cNvSpPr/>
+          <p:nvPr/>
+        </p:nvSpPr>
+        <p:spPr>
+          <a:xfrm>
+            <a:off x="457200" y="4526280"/>
+            <a:ext cx="8229600" cy="256032"/>
+          </a:xfrm>
+          <a:prstGeom prst="rect">
+            <a:avLst/>
+          </a:prstGeom>
+          <a:noFill/>
+          <a:ln/>
+        </p:spPr>
+        <p:txBody>
           <a:bodyPr wrap="square" lIns="0" tIns="0" rIns="0" bIns="0" rtlCol="0" anchor="ctr"/>
           <a:lstStyle/>
           <a:p>
@@ -4083,7 +3509,7 @@
               <a:buNone/>
             </a:pPr>
             <a:r>
-              <a:rPr lang="en-US" sz="900" dirty="0">
+              <a:rPr lang="en-US" sz="1000" i="1" dirty="0">
                 <a:solidFill>
                   <a:srgbClr val="9AABBF"/>
                 </a:solidFill>
@@ -4091,6 +3517,45 @@
                 <a:ea typeface="Calibri" pitchFamily="34" charset="-122"/>
                 <a:cs typeface="Calibri" pitchFamily="34" charset="-120"/>
               </a:rPr>
+              <a:t>Actual source excerpts. Membership validated before token; no API secret in the browser.</a:t>
+            </a:r>
+            <a:endParaRPr lang="en-US" sz="1000" dirty="0"/>
+          </a:p>
+        </p:txBody>
+      </p:sp>
+      <p:sp>
+        <p:nvSpPr>
+          <p:cNvPr id="11" name="Text 9"/>
+          <p:cNvSpPr/>
+          <p:nvPr/>
+        </p:nvSpPr>
+        <p:spPr>
+          <a:xfrm>
+            <a:off x="457200" y="4828032"/>
+            <a:ext cx="6583680" cy="201168"/>
+          </a:xfrm>
+          <a:prstGeom prst="rect">
+            <a:avLst/>
+          </a:prstGeom>
+          <a:noFill/>
+          <a:ln/>
+        </p:spPr>
+        <p:txBody>
+          <a:bodyPr wrap="square" lIns="0" tIns="0" rIns="0" bIns="0" rtlCol="0" anchor="ctr"/>
+          <a:lstStyle/>
+          <a:p>
+            <a:pPr indent="0" marL="0">
+              <a:buNone/>
+            </a:pPr>
+            <a:r>
+              <a:rPr lang="en-US" sz="900" dirty="0">
+                <a:solidFill>
+                  <a:srgbClr val="9AABBF"/>
+                </a:solidFill>
+                <a:latin typeface="Calibri" pitchFamily="34" charset="0"/>
+                <a:ea typeface="Calibri" pitchFamily="34" charset="-122"/>
+                <a:cs typeface="Calibri" pitchFamily="34" charset="-120"/>
+              </a:rPr>
               <a:t>Minduel Lite  ·  DLBSEPPSD01_E  ·  Oral Project Report</a:t>
             </a:r>
             <a:endParaRPr lang="en-US" sz="900" dirty="0"/>
@@ -4099,7 +3564,7 @@
       </p:sp>
       <p:sp>
         <p:nvSpPr>
-          <p:cNvPr id="8" name="Text 5"/>
+          <p:cNvPr id="12" name="Text 10"/>
           <p:cNvSpPr/>
           <p:nvPr/>
         </p:nvSpPr>
@@ -4201,7 +3666,7 @@
                 <a:ea typeface="Calibri" pitchFamily="34" charset="-122"/>
                 <a:cs typeface="Calibri" pitchFamily="34" charset="-120"/>
               </a:rPr>
-              <a:t>4. Implementation — state machine</a:t>
+              <a:t>4. Implementation — matchmaking &amp; third flag</a:t>
             </a:r>
             <a:endParaRPr lang="en-US" sz="2400" dirty="0"/>
           </a:p>
@@ -4232,47 +3697,60 @@
           </a:ln>
         </p:spPr>
       </p:sp>
-      <p:pic>
-        <p:nvPicPr>
-          <p:cNvPr id="4" name="Image 0" descr="D:\Documents\IU\MinduelLite\docs\screenshots\201-state.png">    </p:cNvPr>
-          <p:cNvPicPr>
-            <a:picLocks noChangeAspect="1"/>
-          </p:cNvPicPr>
-          <p:nvPr/>
-        </p:nvPicPr>
-        <p:blipFill>
-          <a:blip r:embed="rId1"/>
-          <a:srcRect l="0" r="0" t="0" b="0"/>
-          <a:stretch/>
-        </p:blipFill>
-        <p:spPr>
-          <a:xfrm>
-            <a:off x="228600" y="914400"/>
-            <a:ext cx="4846320" cy="3383280"/>
-          </a:xfrm>
-          <a:prstGeom prst="rect">
-            <a:avLst/>
-          </a:prstGeom>
-        </p:spPr>
-      </p:pic>
-      <p:sp>
-        <p:nvSpPr>
-          <p:cNvPr id="5" name="Shape 2"/>
-          <p:cNvSpPr/>
-          <p:nvPr/>
-        </p:nvSpPr>
-        <p:spPr>
-          <a:xfrm>
-            <a:off x="5212080" y="1051560"/>
-            <a:ext cx="3474720" cy="3108960"/>
+      <p:sp>
+        <p:nvSpPr>
+          <p:cNvPr id="4" name="Text 2"/>
+          <p:cNvSpPr/>
+          <p:nvPr/>
+        </p:nvSpPr>
+        <p:spPr>
+          <a:xfrm>
+            <a:off x="365760" y="868680"/>
+            <a:ext cx="4206240" cy="228600"/>
+          </a:xfrm>
+          <a:prstGeom prst="rect">
+            <a:avLst/>
+          </a:prstGeom>
+          <a:noFill/>
+          <a:ln/>
+        </p:spPr>
+        <p:txBody>
+          <a:bodyPr wrap="square" lIns="0" tIns="0" rIns="0" bIns="0" rtlCol="0" anchor="ctr"/>
+          <a:lstStyle/>
+          <a:p>
+            <a:pPr indent="0" marL="0">
+              <a:buNone/>
+            </a:pPr>
+            <a:r>
+              <a:rPr lang="en-US" sz="1100" b="1" dirty="0">
+                <a:solidFill>
+                  <a:srgbClr val="4F8CFF"/>
+                </a:solidFill>
+              </a:rPr>
+              <a:t>matchmakingService.js</a:t>
+            </a:r>
+            <a:endParaRPr lang="en-US" sz="1100" dirty="0"/>
+          </a:p>
+        </p:txBody>
+      </p:sp>
+      <p:sp>
+        <p:nvSpPr>
+          <p:cNvPr id="5" name="Shape 3"/>
+          <p:cNvSpPr/>
+          <p:nvPr/>
+        </p:nvSpPr>
+        <p:spPr>
+          <a:xfrm>
+            <a:off x="320040" y="1115568"/>
+            <a:ext cx="4297680" cy="3246120"/>
           </a:xfrm>
           <a:prstGeom prst="roundRect">
             <a:avLst>
-              <a:gd name="adj" fmla="val 2353"/>
+              <a:gd name="adj" fmla="val 1690"/>
             </a:avLst>
           </a:prstGeom>
           <a:solidFill>
-            <a:srgbClr val="1A2332"/>
+            <a:srgbClr val="121A24"/>
           </a:solidFill>
           <a:ln w="12700">
             <a:solidFill>
@@ -4284,14 +3762,14 @@
       </p:sp>
       <p:sp>
         <p:nvSpPr>
-          <p:cNvPr id="6" name="Text 3"/>
-          <p:cNvSpPr/>
-          <p:nvPr/>
-        </p:nvSpPr>
-        <p:spPr>
-          <a:xfrm>
-            <a:off x="5394960" y="1188720"/>
-            <a:ext cx="3108960" cy="274320"/>
+          <p:cNvPr id="6" name="Text 4"/>
+          <p:cNvSpPr/>
+          <p:nvPr/>
+        </p:nvSpPr>
+        <p:spPr>
+          <a:xfrm>
+            <a:off x="457200" y="1207008"/>
+            <a:ext cx="4023360" cy="3063240"/>
           </a:xfrm>
           <a:prstGeom prst="rect">
             <a:avLst/>
@@ -4300,34 +3778,258 @@
           <a:ln/>
         </p:spPr>
         <p:txBody>
-          <a:bodyPr wrap="square" lIns="0" tIns="0" rIns="0" bIns="0" rtlCol="0" anchor="ctr"/>
-          <a:lstStyle/>
-          <a:p>
-            <a:pPr indent="0" marL="0">
-              <a:buNone/>
-            </a:pPr>
-            <a:r>
-              <a:rPr lang="en-US" sz="1400" b="1" dirty="0">
-                <a:solidFill>
-                  <a:srgbClr val="4F8CFF"/>
-                </a:solidFill>
-              </a:rPr>
-              <a:t>Backend authority</a:t>
-            </a:r>
-            <a:endParaRPr lang="en-US" sz="1400" dirty="0"/>
-          </a:p>
-        </p:txBody>
-      </p:sp>
-      <p:sp>
-        <p:nvSpPr>
-          <p:cNvPr id="7" name="Text 4"/>
-          <p:cNvSpPr/>
-          <p:nvPr/>
-        </p:nvSpPr>
-        <p:spPr>
-          <a:xfrm>
-            <a:off x="5394960" y="1554480"/>
-            <a:ext cx="3108960" cy="2377440"/>
+          <a:bodyPr wrap="square" lIns="0" tIns="0" rIns="0" bIns="0" rtlCol="0" anchor="t"/>
+          <a:lstStyle/>
+          <a:p>
+            <a:pPr indent="0" marL="0">
+              <a:buNone/>
+            </a:pPr>
+            <a:r>
+              <a:rPr lang="en-US" sz="1000" dirty="0">
+                <a:solidFill>
+                  <a:srgbClr val="C8D6E5"/>
+                </a:solidFill>
+                <a:latin typeface="Consolas" pitchFamily="34" charset="0"/>
+                <a:ea typeface="Consolas" pitchFamily="34" charset="-122"/>
+                <a:cs typeface="Consolas" pitchFamily="34" charset="-120"/>
+              </a:rPr>
+              <a:t>export function selectBestCandidate(</a:t>
+            </a:r>
+            <a:endParaRPr lang="en-US" sz="1000" dirty="0"/>
+          </a:p>
+          <a:p>
+            <a:pPr indent="0" marL="0">
+              <a:buNone/>
+            </a:pPr>
+            <a:r>
+              <a:rPr lang="en-US" sz="1000" dirty="0">
+                <a:solidFill>
+                  <a:srgbClr val="C8D6E5"/>
+                </a:solidFill>
+                <a:latin typeface="Consolas" pitchFamily="34" charset="0"/>
+                <a:ea typeface="Consolas" pitchFamily="34" charset="-122"/>
+                <a:cs typeface="Consolas" pitchFamily="34" charset="-120"/>
+              </a:rPr>
+              <a:t>  currentInterests, waitingPlayers) {</a:t>
+            </a:r>
+            <a:endParaRPr lang="en-US" sz="1000" dirty="0"/>
+          </a:p>
+          <a:p>
+            <a:pPr indent="0" marL="0">
+              <a:buNone/>
+            </a:pPr>
+            <a:r>
+              <a:rPr lang="en-US" sz="1000" dirty="0">
+                <a:solidFill>
+                  <a:srgbClr val="C8D6E5"/>
+                </a:solidFill>
+                <a:latin typeface="Consolas" pitchFamily="34" charset="0"/>
+                <a:ea typeface="Consolas" pitchFamily="34" charset="-122"/>
+                <a:cs typeface="Consolas" pitchFamily="34" charset="-120"/>
+              </a:rPr>
+              <a:t>  return waitingPlayers</a:t>
+            </a:r>
+            <a:endParaRPr lang="en-US" sz="1000" dirty="0"/>
+          </a:p>
+          <a:p>
+            <a:pPr indent="0" marL="0">
+              <a:buNone/>
+            </a:pPr>
+            <a:r>
+              <a:rPr lang="en-US" sz="1000" dirty="0">
+                <a:solidFill>
+                  <a:srgbClr val="C8D6E5"/>
+                </a:solidFill>
+                <a:latin typeface="Consolas" pitchFamily="34" charset="0"/>
+                <a:ea typeface="Consolas" pitchFamily="34" charset="-122"/>
+                <a:cs typeface="Consolas" pitchFamily="34" charset="-120"/>
+              </a:rPr>
+              <a:t>    .map(c =&gt; ({ ...c,</a:t>
+            </a:r>
+            <a:endParaRPr lang="en-US" sz="1000" dirty="0"/>
+          </a:p>
+          <a:p>
+            <a:pPr indent="0" marL="0">
+              <a:buNone/>
+            </a:pPr>
+            <a:r>
+              <a:rPr lang="en-US" sz="1000" dirty="0">
+                <a:solidFill>
+                  <a:srgbClr val="C8D6E5"/>
+                </a:solidFill>
+                <a:latin typeface="Consolas" pitchFamily="34" charset="0"/>
+                <a:ea typeface="Consolas" pitchFamily="34" charset="-122"/>
+                <a:cs typeface="Consolas" pitchFamily="34" charset="-120"/>
+              </a:rPr>
+              <a:t>      overlap: calculateInterestOverlap(</a:t>
+            </a:r>
+            <a:endParaRPr lang="en-US" sz="1000" dirty="0"/>
+          </a:p>
+          <a:p>
+            <a:pPr indent="0" marL="0">
+              <a:buNone/>
+            </a:pPr>
+            <a:r>
+              <a:rPr lang="en-US" sz="1000" dirty="0">
+                <a:solidFill>
+                  <a:srgbClr val="C8D6E5"/>
+                </a:solidFill>
+                <a:latin typeface="Consolas" pitchFamily="34" charset="0"/>
+                <a:ea typeface="Consolas" pitchFamily="34" charset="-122"/>
+                <a:cs typeface="Consolas" pitchFamily="34" charset="-120"/>
+              </a:rPr>
+              <a:t>        currentInterests, c.interests) }))</a:t>
+            </a:r>
+            <a:endParaRPr lang="en-US" sz="1000" dirty="0"/>
+          </a:p>
+          <a:p>
+            <a:pPr indent="0" marL="0">
+              <a:buNone/>
+            </a:pPr>
+            <a:r>
+              <a:rPr lang="en-US" sz="1000" dirty="0">
+                <a:solidFill>
+                  <a:srgbClr val="C8D6E5"/>
+                </a:solidFill>
+                <a:latin typeface="Consolas" pitchFamily="34" charset="0"/>
+                <a:ea typeface="Consolas" pitchFamily="34" charset="-122"/>
+                <a:cs typeface="Consolas" pitchFamily="34" charset="-120"/>
+              </a:rPr>
+              <a:t>    .filter(c =&gt; c.overlap &gt;= 1) // never 0</a:t>
+            </a:r>
+            <a:endParaRPr lang="en-US" sz="1000" dirty="0"/>
+          </a:p>
+          <a:p>
+            <a:pPr indent="0" marL="0">
+              <a:buNone/>
+            </a:pPr>
+            <a:r>
+              <a:rPr lang="en-US" sz="1000" dirty="0">
+                <a:solidFill>
+                  <a:srgbClr val="C8D6E5"/>
+                </a:solidFill>
+                <a:latin typeface="Consolas" pitchFamily="34" charset="0"/>
+                <a:ea typeface="Consolas" pitchFamily="34" charset="-122"/>
+                <a:cs typeface="Consolas" pitchFamily="34" charset="-120"/>
+              </a:rPr>
+              <a:t>    .sort((a, b) =&gt; {</a:t>
+            </a:r>
+            <a:endParaRPr lang="en-US" sz="1000" dirty="0"/>
+          </a:p>
+          <a:p>
+            <a:pPr indent="0" marL="0">
+              <a:buNone/>
+            </a:pPr>
+            <a:r>
+              <a:rPr lang="en-US" sz="1000" dirty="0">
+                <a:solidFill>
+                  <a:srgbClr val="C8D6E5"/>
+                </a:solidFill>
+                <a:latin typeface="Consolas" pitchFamily="34" charset="0"/>
+                <a:ea typeface="Consolas" pitchFamily="34" charset="-122"/>
+                <a:cs typeface="Consolas" pitchFamily="34" charset="-120"/>
+              </a:rPr>
+              <a:t>      if (b.overlap !== a.overlap)</a:t>
+            </a:r>
+            <a:endParaRPr lang="en-US" sz="1000" dirty="0"/>
+          </a:p>
+          <a:p>
+            <a:pPr indent="0" marL="0">
+              <a:buNone/>
+            </a:pPr>
+            <a:r>
+              <a:rPr lang="en-US" sz="1000" dirty="0">
+                <a:solidFill>
+                  <a:srgbClr val="C8D6E5"/>
+                </a:solidFill>
+                <a:latin typeface="Consolas" pitchFamily="34" charset="0"/>
+                <a:ea typeface="Consolas" pitchFamily="34" charset="-122"/>
+                <a:cs typeface="Consolas" pitchFamily="34" charset="-120"/>
+              </a:rPr>
+              <a:t>        return b.overlap - a.overlap;</a:t>
+            </a:r>
+            <a:endParaRPr lang="en-US" sz="1000" dirty="0"/>
+          </a:p>
+          <a:p>
+            <a:pPr indent="0" marL="0">
+              <a:buNone/>
+            </a:pPr>
+            <a:r>
+              <a:rPr lang="en-US" sz="1000" dirty="0">
+                <a:solidFill>
+                  <a:srgbClr val="C8D6E5"/>
+                </a:solidFill>
+                <a:latin typeface="Consolas" pitchFamily="34" charset="0"/>
+                <a:ea typeface="Consolas" pitchFamily="34" charset="-122"/>
+                <a:cs typeface="Consolas" pitchFamily="34" charset="-120"/>
+              </a:rPr>
+              <a:t>      return new Date(a.joined_at)</a:t>
+            </a:r>
+            <a:endParaRPr lang="en-US" sz="1000" dirty="0"/>
+          </a:p>
+          <a:p>
+            <a:pPr indent="0" marL="0">
+              <a:buNone/>
+            </a:pPr>
+            <a:r>
+              <a:rPr lang="en-US" sz="1000" dirty="0">
+                <a:solidFill>
+                  <a:srgbClr val="C8D6E5"/>
+                </a:solidFill>
+                <a:latin typeface="Consolas" pitchFamily="34" charset="0"/>
+                <a:ea typeface="Consolas" pitchFamily="34" charset="-122"/>
+                <a:cs typeface="Consolas" pitchFamily="34" charset="-120"/>
+              </a:rPr>
+              <a:t>        - new Date(b.joined_at);</a:t>
+            </a:r>
+            <a:endParaRPr lang="en-US" sz="1000" dirty="0"/>
+          </a:p>
+          <a:p>
+            <a:pPr indent="0" marL="0">
+              <a:buNone/>
+            </a:pPr>
+            <a:r>
+              <a:rPr lang="en-US" sz="1000" dirty="0">
+                <a:solidFill>
+                  <a:srgbClr val="C8D6E5"/>
+                </a:solidFill>
+                <a:latin typeface="Consolas" pitchFamily="34" charset="0"/>
+                <a:ea typeface="Consolas" pitchFamily="34" charset="-122"/>
+                <a:cs typeface="Consolas" pitchFamily="34" charset="-120"/>
+              </a:rPr>
+              <a:t>    })[0] || null;</a:t>
+            </a:r>
+            <a:endParaRPr lang="en-US" sz="1000" dirty="0"/>
+          </a:p>
+          <a:p>
+            <a:pPr indent="0" marL="0">
+              <a:buNone/>
+            </a:pPr>
+            <a:r>
+              <a:rPr lang="en-US" sz="1000" dirty="0">
+                <a:solidFill>
+                  <a:srgbClr val="C8D6E5"/>
+                </a:solidFill>
+                <a:latin typeface="Consolas" pitchFamily="34" charset="0"/>
+                <a:ea typeface="Consolas" pitchFamily="34" charset="-122"/>
+                <a:cs typeface="Consolas" pitchFamily="34" charset="-120"/>
+              </a:rPr>
+              <a:t>}</a:t>
+            </a:r>
+            <a:endParaRPr lang="en-US" sz="1000" dirty="0"/>
+          </a:p>
+        </p:txBody>
+      </p:sp>
+      <p:sp>
+        <p:nvSpPr>
+          <p:cNvPr id="7" name="Text 5"/>
+          <p:cNvSpPr/>
+          <p:nvPr/>
+        </p:nvSpPr>
+        <p:spPr>
+          <a:xfrm>
+            <a:off x="4754880" y="868680"/>
+            <a:ext cx="4114800" cy="228600"/>
           </a:xfrm>
           <a:prstGeom prst="rect">
             <a:avLst/>
@@ -4343,189 +4045,450 @@
               <a:buNone/>
             </a:pPr>
             <a:r>
-              <a:rPr lang="en-US" sz="1200" dirty="0">
-                <a:solidFill>
-                  <a:srgbClr val="E8EEF7"/>
+              <a:rPr lang="en-US" sz="1100" b="1" dirty="0">
+                <a:solidFill>
+                  <a:srgbClr val="3ECF8E"/>
+                </a:solidFill>
+              </a:rPr>
+              <a:t>matchService.js — submitReview</a:t>
+            </a:r>
+            <a:endParaRPr lang="en-US" sz="1100" dirty="0"/>
+          </a:p>
+        </p:txBody>
+      </p:sp>
+      <p:sp>
+        <p:nvSpPr>
+          <p:cNvPr id="8" name="Shape 6"/>
+          <p:cNvSpPr/>
+          <p:nvPr/>
+        </p:nvSpPr>
+        <p:spPr>
+          <a:xfrm>
+            <a:off x="4709160" y="1115568"/>
+            <a:ext cx="4160520" cy="3246120"/>
+          </a:xfrm>
+          <a:prstGeom prst="roundRect">
+            <a:avLst>
+              <a:gd name="adj" fmla="val 1690"/>
+            </a:avLst>
+          </a:prstGeom>
+          <a:solidFill>
+            <a:srgbClr val="121A24"/>
+          </a:solidFill>
+          <a:ln w="12700">
+            <a:solidFill>
+              <a:srgbClr val="334155"/>
+            </a:solidFill>
+            <a:prstDash val="solid"/>
+          </a:ln>
+        </p:spPr>
+      </p:sp>
+      <p:sp>
+        <p:nvSpPr>
+          <p:cNvPr id="9" name="Text 7"/>
+          <p:cNvSpPr/>
+          <p:nvPr/>
+        </p:nvSpPr>
+        <p:spPr>
+          <a:xfrm>
+            <a:off x="4846320" y="1207008"/>
+            <a:ext cx="3886200" cy="3063240"/>
+          </a:xfrm>
+          <a:prstGeom prst="rect">
+            <a:avLst/>
+          </a:prstGeom>
+          <a:noFill/>
+          <a:ln/>
+        </p:spPr>
+        <p:txBody>
+          <a:bodyPr wrap="square" lIns="0" tIns="0" rIns="0" bIns="0" rtlCol="0" anchor="t"/>
+          <a:lstStyle/>
+          <a:p>
+            <a:pPr indent="0" marL="0">
+              <a:buNone/>
+            </a:pPr>
+            <a:r>
+              <a:rPr lang="en-US" sz="1000" dirty="0">
+                <a:solidFill>
+                  <a:srgbClr val="C8D6E5"/>
+                </a:solidFill>
+                <a:latin typeface="Consolas" pitchFamily="34" charset="0"/>
+                <a:ea typeface="Consolas" pitchFamily="34" charset="-122"/>
+                <a:cs typeface="Consolas" pitchFamily="34" charset="-120"/>
+              </a:rPr>
+              <a:t>if (flag) {</a:t>
+            </a:r>
+            <a:endParaRPr lang="en-US" sz="1000" dirty="0"/>
+          </a:p>
+          <a:p>
+            <a:pPr indent="0" marL="0">
+              <a:buNone/>
+            </a:pPr>
+            <a:r>
+              <a:rPr lang="en-US" sz="1000" dirty="0">
+                <a:solidFill>
+                  <a:srgbClr val="C8D6E5"/>
+                </a:solidFill>
+                <a:latin typeface="Consolas" pitchFamily="34" charset="0"/>
+                <a:ea typeface="Consolas" pitchFamily="34" charset="-122"/>
+                <a:cs typeface="Consolas" pitchFamily="34" charset="-120"/>
+              </a:rPr>
+              <a:t>  await client.query(</a:t>
+            </a:r>
+            <a:endParaRPr lang="en-US" sz="1000" dirty="0"/>
+          </a:p>
+          <a:p>
+            <a:pPr indent="0" marL="0">
+              <a:buNone/>
+            </a:pPr>
+            <a:r>
+              <a:rPr lang="en-US" sz="1000" dirty="0">
+                <a:solidFill>
+                  <a:srgbClr val="C8D6E5"/>
+                </a:solidFill>
+                <a:latin typeface="Consolas" pitchFamily="34" charset="0"/>
+                <a:ea typeface="Consolas" pitchFamily="34" charset="-122"/>
+                <a:cs typeface="Consolas" pitchFamily="34" charset="-120"/>
+              </a:rPr>
+              <a:t>    `UPDATE matches</a:t>
+            </a:r>
+            <a:endParaRPr lang="en-US" sz="1000" dirty="0"/>
+          </a:p>
+          <a:p>
+            <a:pPr indent="0" marL="0">
+              <a:buNone/>
+            </a:pPr>
+            <a:r>
+              <a:rPr lang="en-US" sz="1000" dirty="0">
+                <a:solidFill>
+                  <a:srgbClr val="C8D6E5"/>
+                </a:solidFill>
+                <a:latin typeface="Consolas" pitchFamily="34" charset="0"/>
+                <a:ea typeface="Consolas" pitchFamily="34" charset="-122"/>
+                <a:cs typeface="Consolas" pitchFamily="34" charset="-120"/>
+              </a:rPr>
+              <a:t>     SET flag_count = flag_count + 1</a:t>
+            </a:r>
+            <a:endParaRPr lang="en-US" sz="1000" dirty="0"/>
+          </a:p>
+          <a:p>
+            <a:pPr indent="0" marL="0">
+              <a:buNone/>
+            </a:pPr>
+            <a:r>
+              <a:rPr lang="en-US" sz="1000" dirty="0">
+                <a:solidFill>
+                  <a:srgbClr val="C8D6E5"/>
+                </a:solidFill>
+                <a:latin typeface="Consolas" pitchFamily="34" charset="0"/>
+                <a:ea typeface="Consolas" pitchFamily="34" charset="-122"/>
+                <a:cs typeface="Consolas" pitchFamily="34" charset="-120"/>
+              </a:rPr>
+              <a:t>     WHERE id = $1`, [matchId]);</a:t>
+            </a:r>
+            <a:endParaRPr lang="en-US" sz="1000" dirty="0"/>
+          </a:p>
+          <a:p>
+            <a:pPr indent="0" marL="0">
+              <a:buNone/>
+            </a:pPr>
+            <a:r>
+              <a:rPr lang="en-US" sz="1000" dirty="0">
+                <a:solidFill>
+                  <a:srgbClr val="C8D6E5"/>
+                </a:solidFill>
+                <a:latin typeface="Consolas" pitchFamily="34" charset="0"/>
+                <a:ea typeface="Consolas" pitchFamily="34" charset="-122"/>
+                <a:cs typeface="Consolas" pitchFamily="34" charset="-120"/>
+              </a:rPr>
+              <a:t>}</a:t>
+            </a:r>
+            <a:endParaRPr lang="en-US" sz="1000" dirty="0"/>
+          </a:p>
+          <a:p>
+            <a:pPr indent="0" marL="0">
+              <a:buNone/>
+            </a:pPr>
+            <a:r>
+              <a:rPr lang="en-US" sz="1000" dirty="0">
+                <a:solidFill>
+                  <a:srgbClr val="C8D6E5"/>
+                </a:solidFill>
+                <a:latin typeface="Consolas" pitchFamily="34" charset="0"/>
+                <a:ea typeface="Consolas" pitchFamily="34" charset="-122"/>
+                <a:cs typeface="Consolas" pitchFamily="34" charset="-120"/>
+              </a:rPr>
+              <a:t>const m = (await client.query(</a:t>
+            </a:r>
+            <a:endParaRPr lang="en-US" sz="1000" dirty="0"/>
+          </a:p>
+          <a:p>
+            <a:pPr indent="0" marL="0">
+              <a:buNone/>
+            </a:pPr>
+            <a:r>
+              <a:rPr lang="en-US" sz="1000" dirty="0">
+                <a:solidFill>
+                  <a:srgbClr val="C8D6E5"/>
+                </a:solidFill>
+                <a:latin typeface="Consolas" pitchFamily="34" charset="0"/>
+                <a:ea typeface="Consolas" pitchFamily="34" charset="-122"/>
+                <a:cs typeface="Consolas" pitchFamily="34" charset="-120"/>
+              </a:rPr>
+              <a:t>  'SELECT * FROM matches WHERE id = $1',</a:t>
+            </a:r>
+            <a:endParaRPr lang="en-US" sz="1000" dirty="0"/>
+          </a:p>
+          <a:p>
+            <a:pPr indent="0" marL="0">
+              <a:buNone/>
+            </a:pPr>
+            <a:r>
+              <a:rPr lang="en-US" sz="1000" dirty="0">
+                <a:solidFill>
+                  <a:srgbClr val="C8D6E5"/>
+                </a:solidFill>
+                <a:latin typeface="Consolas" pitchFamily="34" charset="0"/>
+                <a:ea typeface="Consolas" pitchFamily="34" charset="-122"/>
+                <a:cs typeface="Consolas" pitchFamily="34" charset="-120"/>
+              </a:rPr>
+              <a:t>  [matchId])).rows[0];</a:t>
+            </a:r>
+            <a:endParaRPr lang="en-US" sz="1000" dirty="0"/>
+          </a:p>
+          <a:p>
+            <a:pPr indent="0" marL="0">
+              <a:buNone/>
+            </a:pPr>
+            <a:endParaRPr lang="en-US" sz="1000" dirty="0"/>
+          </a:p>
+          <a:p>
+            <a:pPr indent="0" marL="0">
+              <a:buNone/>
+            </a:pPr>
+            <a:r>
+              <a:rPr lang="en-US" sz="1000" dirty="0">
+                <a:solidFill>
+                  <a:srgbClr val="C8D6E5"/>
+                </a:solidFill>
+                <a:latin typeface="Consolas" pitchFamily="34" charset="0"/>
+                <a:ea typeface="Consolas" pitchFamily="34" charset="-122"/>
+                <a:cs typeface="Consolas" pitchFamily="34" charset="-120"/>
+              </a:rPr>
+              <a:t>// Immediate end — do not wait for</a:t>
+            </a:r>
+            <a:endParaRPr lang="en-US" sz="1000" dirty="0"/>
+          </a:p>
+          <a:p>
+            <a:pPr indent="0" marL="0">
+              <a:buNone/>
+            </a:pPr>
+            <a:r>
+              <a:rPr lang="en-US" sz="1000" dirty="0">
+                <a:solidFill>
+                  <a:srgbClr val="C8D6E5"/>
+                </a:solidFill>
+                <a:latin typeface="Consolas" pitchFamily="34" charset="0"/>
+                <a:ea typeface="Consolas" pitchFamily="34" charset="-122"/>
+                <a:cs typeface="Consolas" pitchFamily="34" charset="-120"/>
+              </a:rPr>
+              <a:t>// the other player's review</a:t>
+            </a:r>
+            <a:endParaRPr lang="en-US" sz="1000" dirty="0"/>
+          </a:p>
+          <a:p>
+            <a:pPr indent="0" marL="0">
+              <a:buNone/>
+            </a:pPr>
+            <a:r>
+              <a:rPr lang="en-US" sz="1000" dirty="0">
+                <a:solidFill>
+                  <a:srgbClr val="C8D6E5"/>
+                </a:solidFill>
+                <a:latin typeface="Consolas" pitchFamily="34" charset="0"/>
+                <a:ea typeface="Consolas" pitchFamily="34" charset="-122"/>
+                <a:cs typeface="Consolas" pitchFamily="34" charset="-120"/>
+              </a:rPr>
+              <a:t>if (m.flag_count &gt;= 3) {</a:t>
+            </a:r>
+            <a:endParaRPr lang="en-US" sz="1000" dirty="0"/>
+          </a:p>
+          <a:p>
+            <a:pPr indent="0" marL="0">
+              <a:buNone/>
+            </a:pPr>
+            <a:r>
+              <a:rPr lang="en-US" sz="1000" dirty="0">
+                <a:solidFill>
+                  <a:srgbClr val="C8D6E5"/>
+                </a:solidFill>
+                <a:latin typeface="Consolas" pitchFamily="34" charset="0"/>
+                <a:ea typeface="Consolas" pitchFamily="34" charset="-122"/>
+                <a:cs typeface="Consolas" pitchFamily="34" charset="-120"/>
+              </a:rPr>
+              <a:t>  await client.query(</a:t>
+            </a:r>
+            <a:endParaRPr lang="en-US" sz="1000" dirty="0"/>
+          </a:p>
+          <a:p>
+            <a:pPr indent="0" marL="0">
+              <a:buNone/>
+            </a:pPr>
+            <a:r>
+              <a:rPr lang="en-US" sz="1000" dirty="0">
+                <a:solidFill>
+                  <a:srgbClr val="C8D6E5"/>
+                </a:solidFill>
+                <a:latin typeface="Consolas" pitchFamily="34" charset="0"/>
+                <a:ea typeface="Consolas" pitchFamily="34" charset="-122"/>
+                <a:cs typeface="Consolas" pitchFamily="34" charset="-120"/>
+              </a:rPr>
+              <a:t>    `UPDATE matches SET status='ENDED',</a:t>
+            </a:r>
+            <a:endParaRPr lang="en-US" sz="1000" dirty="0"/>
+          </a:p>
+          <a:p>
+            <a:pPr indent="0" marL="0">
+              <a:buNone/>
+            </a:pPr>
+            <a:r>
+              <a:rPr lang="en-US" sz="1000" dirty="0">
+                <a:solidFill>
+                  <a:srgbClr val="C8D6E5"/>
+                </a:solidFill>
+                <a:latin typeface="Consolas" pitchFamily="34" charset="0"/>
+                <a:ea typeface="Consolas" pitchFamily="34" charset="-122"/>
+                <a:cs typeface="Consolas" pitchFamily="34" charset="-120"/>
+              </a:rPr>
+              <a:t>     end_reason='THREE_FLAGS',</a:t>
+            </a:r>
+            <a:endParaRPr lang="en-US" sz="1000" dirty="0"/>
+          </a:p>
+          <a:p>
+            <a:pPr indent="0" marL="0">
+              <a:buNone/>
+            </a:pPr>
+            <a:r>
+              <a:rPr lang="en-US" sz="1000" dirty="0">
+                <a:solidFill>
+                  <a:srgbClr val="C8D6E5"/>
+                </a:solidFill>
+                <a:latin typeface="Consolas" pitchFamily="34" charset="0"/>
+                <a:ea typeface="Consolas" pitchFamily="34" charset="-122"/>
+                <a:cs typeface="Consolas" pitchFamily="34" charset="-120"/>
+              </a:rPr>
+              <a:t>     ended_at=NOW() WHERE id=$1`,</a:t>
+            </a:r>
+            <a:endParaRPr lang="en-US" sz="1000" dirty="0"/>
+          </a:p>
+          <a:p>
+            <a:pPr indent="0" marL="0">
+              <a:buNone/>
+            </a:pPr>
+            <a:r>
+              <a:rPr lang="en-US" sz="1000" dirty="0">
+                <a:solidFill>
+                  <a:srgbClr val="C8D6E5"/>
+                </a:solidFill>
+                <a:latin typeface="Consolas" pitchFamily="34" charset="0"/>
+                <a:ea typeface="Consolas" pitchFamily="34" charset="-122"/>
+                <a:cs typeface="Consolas" pitchFamily="34" charset="-120"/>
+              </a:rPr>
+              <a:t>    [matchId]);</a:t>
+            </a:r>
+            <a:endParaRPr lang="en-US" sz="1000" dirty="0"/>
+          </a:p>
+          <a:p>
+            <a:pPr indent="0" marL="0">
+              <a:buNone/>
+            </a:pPr>
+            <a:r>
+              <a:rPr lang="en-US" sz="1000" dirty="0">
+                <a:solidFill>
+                  <a:srgbClr val="C8D6E5"/>
+                </a:solidFill>
+                <a:latin typeface="Consolas" pitchFamily="34" charset="0"/>
+                <a:ea typeface="Consolas" pitchFamily="34" charset="-122"/>
+                <a:cs typeface="Consolas" pitchFamily="34" charset="-120"/>
+              </a:rPr>
+              <a:t>}</a:t>
+            </a:r>
+            <a:endParaRPr lang="en-US" sz="1000" dirty="0"/>
+          </a:p>
+        </p:txBody>
+      </p:sp>
+      <p:sp>
+        <p:nvSpPr>
+          <p:cNvPr id="10" name="Text 8"/>
+          <p:cNvSpPr/>
+          <p:nvPr/>
+        </p:nvSpPr>
+        <p:spPr>
+          <a:xfrm>
+            <a:off x="457200" y="4526280"/>
+            <a:ext cx="8229600" cy="256032"/>
+          </a:xfrm>
+          <a:prstGeom prst="rect">
+            <a:avLst/>
+          </a:prstGeom>
+          <a:noFill/>
+          <a:ln/>
+        </p:spPr>
+        <p:txBody>
+          <a:bodyPr wrap="square" lIns="0" tIns="0" rIns="0" bIns="0" rtlCol="0" anchor="ctr"/>
+          <a:lstStyle/>
+          <a:p>
+            <a:pPr indent="0" marL="0">
+              <a:buNone/>
+            </a:pPr>
+            <a:r>
+              <a:rPr lang="en-US" sz="1000" i="1" dirty="0">
+                <a:solidFill>
+                  <a:srgbClr val="9AABBF"/>
                 </a:solidFill>
                 <a:latin typeface="Calibri" pitchFamily="34" charset="0"/>
                 <a:ea typeface="Calibri" pitchFamily="34" charset="-122"/>
                 <a:cs typeface="Calibri" pitchFamily="34" charset="-120"/>
               </a:rPr>
-              <a:t>Frontend polls phase; does not invent rules.</a:t>
-            </a:r>
-            <a:endParaRPr lang="en-US" sz="1200" dirty="0"/>
-          </a:p>
-          <a:p>
-            <a:pPr indent="0" marL="0">
-              <a:buNone/>
-            </a:pPr>
-            <a:endParaRPr lang="en-US" sz="1200" dirty="0"/>
-          </a:p>
-          <a:p>
-            <a:pPr indent="0" marL="0">
-              <a:buNone/>
-            </a:pPr>
-            <a:r>
-              <a:rPr lang="en-US" sz="1200" dirty="0">
-                <a:solidFill>
-                  <a:srgbClr val="E8EEF7"/>
+              <a:t>Business logic excerpts: interest priority 3→2→1; third flag ends at count 3 (parameterized SQL).</a:t>
+            </a:r>
+            <a:endParaRPr lang="en-US" sz="1000" dirty="0"/>
+          </a:p>
+        </p:txBody>
+      </p:sp>
+      <p:sp>
+        <p:nvSpPr>
+          <p:cNvPr id="11" name="Text 9"/>
+          <p:cNvSpPr/>
+          <p:nvPr/>
+        </p:nvSpPr>
+        <p:spPr>
+          <a:xfrm>
+            <a:off x="457200" y="4828032"/>
+            <a:ext cx="6583680" cy="201168"/>
+          </a:xfrm>
+          <a:prstGeom prst="rect">
+            <a:avLst/>
+          </a:prstGeom>
+          <a:noFill/>
+          <a:ln/>
+        </p:spPr>
+        <p:txBody>
+          <a:bodyPr wrap="square" lIns="0" tIns="0" rIns="0" bIns="0" rtlCol="0" anchor="ctr"/>
+          <a:lstStyle/>
+          <a:p>
+            <a:pPr indent="0" marL="0">
+              <a:buNone/>
+            </a:pPr>
+            <a:r>
+              <a:rPr lang="en-US" sz="900" dirty="0">
+                <a:solidFill>
+                  <a:srgbClr val="9AABBF"/>
                 </a:solidFill>
                 <a:latin typeface="Calibri" pitchFamily="34" charset="0"/>
                 <a:ea typeface="Calibri" pitchFamily="34" charset="-122"/>
                 <a:cs typeface="Calibri" pitchFamily="34" charset="-120"/>
               </a:rPr>
-              <a:t>resolveAfterBothReviews:</a:t>
-            </a:r>
-            <a:endParaRPr lang="en-US" sz="1200" dirty="0"/>
-          </a:p>
-          <a:p>
-            <a:pPr indent="0" marL="0">
-              <a:buNone/>
-            </a:pPr>
-            <a:r>
-              <a:rPr lang="en-US" sz="1200" dirty="0">
-                <a:solidFill>
-                  <a:srgbClr val="E8EEF7"/>
-                </a:solidFill>
-                <a:latin typeface="Calibri" pitchFamily="34" charset="0"/>
-                <a:ea typeface="Calibri" pitchFamily="34" charset="-122"/>
-                <a:cs typeface="Calibri" pitchFamily="34" charset="-120"/>
-              </a:rPr>
-              <a:t>• flags ≥ 3 → THREE_FLAGS</a:t>
-            </a:r>
-            <a:endParaRPr lang="en-US" sz="1200" dirty="0"/>
-          </a:p>
-          <a:p>
-            <a:pPr indent="0" marL="0">
-              <a:buNone/>
-            </a:pPr>
-            <a:r>
-              <a:rPr lang="en-US" sz="1200" dirty="0">
-                <a:solidFill>
-                  <a:srgbClr val="E8EEF7"/>
-                </a:solidFill>
-                <a:latin typeface="Calibri" pitchFamily="34" charset="0"/>
-                <a:ea typeface="Calibri" pitchFamily="34" charset="-122"/>
-                <a:cs typeface="Calibri" pitchFamily="34" charset="-120"/>
-              </a:rPr>
-              <a:t>• Q = 10 → COMPLETED</a:t>
-            </a:r>
-            <a:endParaRPr lang="en-US" sz="1200" dirty="0"/>
-          </a:p>
-          <a:p>
-            <a:pPr indent="0" marL="0">
-              <a:buNone/>
-            </a:pPr>
-            <a:r>
-              <a:rPr lang="en-US" sz="1200" dirty="0">
-                <a:solidFill>
-                  <a:srgbClr val="E8EEF7"/>
-                </a:solidFill>
-                <a:latin typeface="Calibri" pitchFamily="34" charset="0"/>
-                <a:ea typeface="Calibri" pitchFamily="34" charset="-122"/>
-                <a:cs typeface="Calibri" pitchFamily="34" charset="-120"/>
-              </a:rPr>
-              <a:t>• else next question</a:t>
-            </a:r>
-            <a:endParaRPr lang="en-US" sz="1200" dirty="0"/>
-          </a:p>
-          <a:p>
-            <a:pPr indent="0" marL="0">
-              <a:buNone/>
-            </a:pPr>
-            <a:endParaRPr lang="en-US" sz="1200" dirty="0"/>
-          </a:p>
-          <a:p>
-            <a:pPr indent="0" marL="0">
-              <a:buNone/>
-            </a:pPr>
-            <a:r>
-              <a:rPr lang="en-US" sz="1200" dirty="0">
-                <a:solidFill>
-                  <a:srgbClr val="E8EEF7"/>
-                </a:solidFill>
-                <a:latin typeface="Calibri" pitchFamily="34" charset="0"/>
-                <a:ea typeface="Calibri" pitchFamily="34" charset="-122"/>
-                <a:cs typeface="Calibri" pitchFamily="34" charset="-120"/>
-              </a:rPr>
-              <a:t>advanceMatch() applies the decision in SQL.</a:t>
-            </a:r>
-            <a:endParaRPr lang="en-US" sz="1200" dirty="0"/>
-          </a:p>
-        </p:txBody>
-      </p:sp>
-      <p:sp>
-        <p:nvSpPr>
-          <p:cNvPr id="8" name="Text 5"/>
-          <p:cNvSpPr/>
-          <p:nvPr/>
-        </p:nvSpPr>
-        <p:spPr>
-          <a:xfrm>
-            <a:off x="457200" y="4526280"/>
-            <a:ext cx="8229600" cy="256032"/>
-          </a:xfrm>
-          <a:prstGeom prst="rect">
-            <a:avLst/>
-          </a:prstGeom>
-          <a:noFill/>
-          <a:ln/>
-        </p:spPr>
-        <p:txBody>
-          <a:bodyPr wrap="square" lIns="0" tIns="0" rIns="0" bIns="0" rtlCol="0" anchor="ctr"/>
-          <a:lstStyle/>
-          <a:p>
-            <a:pPr indent="0" marL="0">
-              <a:buNone/>
-            </a:pPr>
-            <a:r>
-              <a:rPr lang="en-US" sz="1000" i="1" dirty="0">
-                <a:solidFill>
-                  <a:srgbClr val="9AABBF"/>
-                </a:solidFill>
-                <a:latin typeface="Calibri" pitchFamily="34" charset="0"/>
-                <a:ea typeface="Calibri" pitchFamily="34" charset="-122"/>
-                <a:cs typeface="Calibri" pitchFamily="34" charset="-120"/>
-              </a:rPr>
-              <a:t>Figure 8. User flow &amp; match state (own diagram). Code: matchService.js.</a:t>
-            </a:r>
-            <a:endParaRPr lang="en-US" sz="1000" dirty="0"/>
-          </a:p>
-        </p:txBody>
-      </p:sp>
-      <p:sp>
-        <p:nvSpPr>
-          <p:cNvPr id="9" name="Text 6"/>
-          <p:cNvSpPr/>
-          <p:nvPr/>
-        </p:nvSpPr>
-        <p:spPr>
-          <a:xfrm>
-            <a:off x="457200" y="4828032"/>
-            <a:ext cx="6583680" cy="201168"/>
-          </a:xfrm>
-          <a:prstGeom prst="rect">
-            <a:avLst/>
-          </a:prstGeom>
-          <a:noFill/>
-          <a:ln/>
-        </p:spPr>
-        <p:txBody>
-          <a:bodyPr wrap="square" lIns="0" tIns="0" rIns="0" bIns="0" rtlCol="0" anchor="ctr"/>
-          <a:lstStyle/>
-          <a:p>
-            <a:pPr indent="0" marL="0">
-              <a:buNone/>
-            </a:pPr>
-            <a:r>
-              <a:rPr lang="en-US" sz="900" dirty="0">
-                <a:solidFill>
-                  <a:srgbClr val="9AABBF"/>
-                </a:solidFill>
-                <a:latin typeface="Calibri" pitchFamily="34" charset="0"/>
-                <a:ea typeface="Calibri" pitchFamily="34" charset="-122"/>
-                <a:cs typeface="Calibri" pitchFamily="34" charset="-120"/>
-              </a:rPr>
               <a:t>Minduel Lite  ·  DLBSEPPSD01_E  ·  Oral Project Report</a:t>
             </a:r>
             <a:endParaRPr lang="en-US" sz="900" dirty="0"/>
@@ -4534,7 +4497,7 @@
       </p:sp>
       <p:sp>
         <p:nvSpPr>
-          <p:cNvPr id="10" name="Text 7"/>
+          <p:cNvPr id="12" name="Text 10"/>
           <p:cNvSpPr/>
           <p:nvPr/>
         </p:nvSpPr>
@@ -4676,7 +4639,7 @@
         <p:spPr>
           <a:xfrm>
             <a:off x="457200" y="868680"/>
-            <a:ext cx="8229600" cy="274320"/>
+            <a:ext cx="8229600" cy="1051560"/>
           </a:xfrm>
           <a:prstGeom prst="rect">
             <a:avLst/>
@@ -4692,12 +4655,73 @@
               <a:buNone/>
             </a:pPr>
             <a:r>
-              <a:rPr lang="en-US" sz="1200" i="1" dirty="0">
-                <a:solidFill>
-                  <a:srgbClr val="9AABBF"/>
-                </a:solidFill>
-              </a:rPr>
-              <a:t>Automated tests cover core business rules; Docker Compose is the only required runtime path.</a:t>
+              <a:rPr lang="en-US" sz="1200" b="1" dirty="0">
+                <a:solidFill>
+                  <a:srgbClr val="E8EEF7"/>
+                </a:solidFill>
+              </a:rPr>
+              <a:t>Backend: </a:t>
+            </a:r>
+            <a:pPr indent="0" marL="0">
+              <a:buNone/>
+            </a:pPr>
+            <a:r>
+              <a:rPr lang="en-US" sz="1200" dirty="0">
+                <a:solidFill>
+                  <a:srgbClr val="E8EEF7"/>
+                </a:solidFill>
+              </a:rPr>
+              <a:t>audio-token (participant / outsider / ended match / no secret leak); answer-complete; third-flag from flag_count=2</a:t>
+            </a:r>
+            <a:endParaRPr lang="en-US" sz="1200" dirty="0"/>
+          </a:p>
+          <a:p>
+            <a:pPr indent="0" marL="0">
+              <a:buNone/>
+            </a:pPr>
+            <a:r>
+              <a:rPr lang="en-US" sz="1200" b="1" dirty="0">
+                <a:solidFill>
+                  <a:srgbClr val="E8EEF7"/>
+                </a:solidFill>
+              </a:rPr>
+              <a:t>Frontend: </a:t>
+            </a:r>
+            <a:pPr indent="0" marL="0">
+              <a:buNone/>
+            </a:pPr>
+            <a:r>
+              <a:rPr lang="en-US" sz="1200" dirty="0">
+                <a:solidFill>
+                  <a:srgbClr val="E8EEF7"/>
+                </a:solidFill>
+              </a:rPr>
+              <a:t>MatchAudio CONNECTING / CONNECTED / FAILED + RETRY; cleanup disconnect; Answer complete calls completeAnswer</a:t>
+            </a:r>
+            <a:endParaRPr lang="en-US" sz="1200" dirty="0"/>
+          </a:p>
+          <a:p>
+            <a:pPr indent="0" marL="0">
+              <a:buNone/>
+            </a:pPr>
+            <a:r>
+              <a:rPr lang="en-US" sz="1200" b="1" dirty="0">
+                <a:solidFill>
+                  <a:srgbClr val="E8EEF7"/>
+                </a:solidFill>
+              </a:rPr>
+              <a:t>Manual: </a:t>
+            </a:r>
+            <a:pPr indent="0" marL="0">
+              <a:buNone/>
+            </a:pPr>
+            <a:r>
+              <a:rPr lang="en-US" sz="1200" dirty="0">
+                <a:solidFill>
+                  <a:srgbClr val="E8EEF7"/>
+                </a:solidFill>
+              </a:rPr>
+              <a:t>Chrome + Incognito; mic permission; Live audio connected; speak both ways; full spoken match path</a:t>
             </a:r>
             <a:endParaRPr lang="en-US" sz="1200" dirty="0"/>
           </a:p>
@@ -4705,7 +4729,7 @@
       </p:sp>
       <p:pic>
         <p:nvPicPr>
-          <p:cNvPr id="5" name="Image 0" descr="D:\Documents\IU\MinduelLite\docs\screenshots\197-tests.png">    </p:cNvPr>
+          <p:cNvPr id="5" name="Image 0" descr="D:\Documents\IU\MinduelLite\docs\screenshots\210-backend-tests.png">    </p:cNvPr>
           <p:cNvPicPr>
             <a:picLocks noChangeAspect="1"/>
           </p:cNvPicPr>
@@ -4718,8 +4742,8 @@
         </p:blipFill>
         <p:spPr>
           <a:xfrm>
-            <a:off x="274320" y="1188720"/>
-            <a:ext cx="4389120" cy="3017520"/>
+            <a:off x="274320" y="2011680"/>
+            <a:ext cx="4206240" cy="2331720"/>
           </a:xfrm>
           <a:prstGeom prst="rect">
             <a:avLst/>
@@ -4728,7 +4752,7 @@
       </p:pic>
       <p:pic>
         <p:nvPicPr>
-          <p:cNvPr id="6" name="Image 1" descr="D:\Documents\IU\MinduelLite\docs\screenshots\198-docker.png">    </p:cNvPr>
+          <p:cNvPr id="6" name="Image 1" descr="D:\Documents\IU\MinduelLite\docs\screenshots\212-docker.png">    </p:cNvPr>
           <p:cNvPicPr>
             <a:picLocks noChangeAspect="1"/>
           </p:cNvPicPr>
@@ -4741,8 +4765,8 @@
         </p:blipFill>
         <p:spPr>
           <a:xfrm>
-            <a:off x="4846320" y="1188720"/>
-            <a:ext cx="3931920" cy="2011680"/>
+            <a:off x="4754880" y="2011680"/>
+            <a:ext cx="4023360" cy="1828800"/>
           </a:xfrm>
           <a:prstGeom prst="rect">
             <a:avLst/>
@@ -4757,8 +4781,8 @@
         </p:nvSpPr>
         <p:spPr>
           <a:xfrm>
-            <a:off x="4846320" y="3337560"/>
-            <a:ext cx="3931920" cy="640080"/>
+            <a:off x="4754880" y="3931920"/>
+            <a:ext cx="4023360" cy="320040"/>
           </a:xfrm>
           <a:prstGeom prst="rect">
             <a:avLst/>
@@ -4774,7 +4798,7 @@
               <a:buNone/>
             </a:pPr>
             <a:r>
-              <a:rPr lang="en-US" sz="1200" dirty="0">
+              <a:rPr lang="en-US" sz="1100" dirty="0">
                 <a:solidFill>
                   <a:srgbClr val="9AABBF"/>
                 </a:solidFill>
@@ -4782,26 +4806,9 @@
                 <a:ea typeface="Consolas" pitchFamily="34" charset="-122"/>
                 <a:cs typeface="Consolas" pitchFamily="34" charset="-120"/>
               </a:rPr>
-              <a:t>Command: docker compose up --build</a:t>
-            </a:r>
-            <a:endParaRPr lang="en-US" sz="1200" dirty="0"/>
-          </a:p>
-          <a:p>
-            <a:pPr indent="0" marL="0">
-              <a:buNone/>
-            </a:pPr>
-            <a:r>
-              <a:rPr lang="en-US" sz="1200" dirty="0">
-                <a:solidFill>
-                  <a:srgbClr val="9AABBF"/>
-                </a:solidFill>
-                <a:latin typeface="Consolas" pitchFamily="34" charset="0"/>
-                <a:ea typeface="Consolas" pitchFamily="34" charset="-122"/>
-                <a:cs typeface="Consolas" pitchFamily="34" charset="-120"/>
-              </a:rPr>
-              <a:t>No manual DB setup (schema.sql + seed.sql).</a:t>
-            </a:r>
-            <a:endParaRPr lang="en-US" sz="1200" dirty="0"/>
+              <a:t>docker compose up --build  ·  LiveKit env on backend only</a:t>
+            </a:r>
+            <a:endParaRPr lang="en-US" sz="1100" dirty="0"/>
           </a:p>
         </p:txBody>
       </p:sp>
@@ -4838,7 +4845,7 @@
                 <a:ea typeface="Calibri" pitchFamily="34" charset="-122"/>
                 <a:cs typeface="Calibri" pitchFamily="34" charset="-120"/>
               </a:rPr>
-              <a:t>Figures 9–10. Test run output; Docker Compose services (own environment).</a:t>
+              <a:t>Figures. Backend test evidence; Docker services (own environment).</a:t>
             </a:r>
             <a:endParaRPr lang="en-US" sz="1000" dirty="0"/>
           </a:p>
@@ -5088,7 +5095,7 @@
                   <a:srgbClr val="E8EEF7"/>
                 </a:solidFill>
               </a:rPr>
-              <a:t>Two independent browser sessions share one backend and database</a:t>
+              <a:t>Two browser sessions share Express + PostgreSQL; each joins LiveKit for speech</a:t>
             </a:r>
             <a:endParaRPr lang="en-US" sz="1400" dirty="0"/>
           </a:p>
@@ -5106,7 +5113,7 @@
                   <a:srgbClr val="E8EEF7"/>
                 </a:solidFill>
               </a:rPr>
-              <a:t>Interest matchmaking pairs compatible players into one matchId</a:t>
+              <a:t>Match created → audio connected → spoken answers (answer-complete, no text upload)</a:t>
             </a:r>
             <a:endParaRPr lang="en-US" sz="1400" dirty="0"/>
           </a:p>
@@ -5124,7 +5131,7 @@
                   <a:srgbClr val="E8EEF7"/>
                 </a:solidFill>
               </a:rPr>
-              <a:t>Authoritative phases: answer → score → review; flags and Q10 termination</a:t>
+              <a:t>Authoritative phases: speak → score → review; third flag ends immediately</a:t>
             </a:r>
             <a:endParaRPr lang="en-US" sz="1400" dirty="0"/>
           </a:p>
@@ -5142,7 +5149,7 @@
                   <a:srgbClr val="E8EEF7"/>
                 </a:solidFill>
               </a:rPr>
-              <a:t>Results exclude flagged scores; play-again reuses temporary session</a:t>
+              <a:t>Speech not recorded/stored/transcribed; only completion flags + scores in DB</a:t>
             </a:r>
             <a:endParaRPr lang="en-US" sz="1400" dirty="0"/>
           </a:p>
@@ -5160,7 +5167,7 @@
                   <a:srgbClr val="E8EEF7"/>
                 </a:solidFill>
               </a:rPr>
-              <a:t>Clean volume init: five tables + 1,000 questions without manual SQL steps</a:t>
+              <a:t>Play-again: new match + new LiveKit room; Docker Compose runs three app services</a:t>
             </a:r>
             <a:endParaRPr lang="en-US" sz="1400" dirty="0"/>
           </a:p>
@@ -5178,7 +5185,7 @@
                   <a:srgbClr val="E8EEF7"/>
                 </a:solidFill>
               </a:rPr>
-              <a:t>Repository published with frontend, backend, DB, Docker, tests, docs</a:t>
+              <a:t>Repository: frontend, backend, DB, Docker, tests, docs (GitHub on title slide)</a:t>
             </a:r>
             <a:endParaRPr lang="en-US" sz="1400" dirty="0"/>
           </a:p>
@@ -5500,7 +5507,7 @@
                   <a:srgbClr val="E8EEF7"/>
                 </a:solidFill>
               </a:rPr>
-              <a:t>10-question completion + scoring</a:t>
+              <a:t>Live spoken turns + peer scoring</a:t>
             </a:r>
             <a:endParaRPr lang="en-US" sz="1200" dirty="0"/>
           </a:p>
@@ -5518,7 +5525,7 @@
                   <a:srgbClr val="E8EEF7"/>
                 </a:solidFill>
               </a:rPr>
-              <a:t>Flags → THREE_FLAGS termination</a:t>
+              <a:t>Flags → THREE_FLAGS at count 3</a:t>
             </a:r>
             <a:endParaRPr lang="en-US" sz="1200" dirty="0"/>
           </a:p>
@@ -5536,7 +5543,7 @@
                   <a:srgbClr val="E8EEF7"/>
                 </a:solidFill>
               </a:rPr>
-              <a:t>Results exclude flagged scores</a:t>
+              <a:t>SPA + API + Postgres + LiveKit</a:t>
             </a:r>
             <a:endParaRPr lang="en-US" sz="1200" dirty="0"/>
           </a:p>
@@ -5554,7 +5561,7 @@
                   <a:srgbClr val="E8EEF7"/>
                 </a:solidFill>
               </a:rPr>
-              <a:t>SPA + API + Postgres integrate</a:t>
+              <a:t>Docker Compose (3 app services)</a:t>
             </a:r>
             <a:endParaRPr lang="en-US" sz="1200" dirty="0"/>
           </a:p>
@@ -5572,24 +5579,6 @@
                   <a:srgbClr val="E8EEF7"/>
                 </a:solidFill>
               </a:rPr>
-              <a:t>Docker Compose one-command run</a:t>
-            </a:r>
-            <a:endParaRPr lang="en-US" sz="1200" dirty="0"/>
-          </a:p>
-          <a:p>
-            <a:pPr marL="342900" indent="-342900">
-              <a:spcAft>
-                <a:spcPts val="300"/>
-              </a:spcAft>
-              <a:buSzPct val="100000"/>
-              <a:buChar char="•"/>
-            </a:pPr>
-            <a:r>
-              <a:rPr lang="en-US" sz="1200" dirty="0">
-                <a:solidFill>
-                  <a:srgbClr val="E8EEF7"/>
-                </a:solidFill>
-              </a:rPr>
               <a:t>Automated tests pass (FE + BE)</a:t>
             </a:r>
             <a:endParaRPr lang="en-US" sz="1200" dirty="0"/>
@@ -5626,7 +5615,7 @@
                   <a:srgbClr val="9AABBF"/>
                 </a:solidFill>
               </a:rPr>
-              <a:t>Limitations (intentional)</a:t>
+              <a:t>Why LiveKit (not raw WebRTC)</a:t>
             </a:r>
             <a:endParaRPr lang="en-US" sz="1300" dirty="0"/>
           </a:p>
@@ -5640,8 +5629,8 @@
         </p:nvSpPr>
         <p:spPr>
           <a:xfrm>
-            <a:off x="4846320" y="1645920"/>
-            <a:ext cx="3840480" cy="2651760"/>
+            <a:off x="4846320" y="1600200"/>
+            <a:ext cx="3840480" cy="2697480"/>
           </a:xfrm>
           <a:prstGeom prst="rect">
             <a:avLst/>
@@ -5657,14 +5646,110 @@
               <a:buNone/>
             </a:pPr>
             <a:r>
-              <a:rPr lang="en-US" sz="1200" dirty="0">
+              <a:rPr lang="en-US" sz="1100" dirty="0">
                 <a:solidFill>
                   <a:srgbClr val="E8EEF7"/>
                 </a:solidFill>
               </a:rPr>
-              <a:t>Excluded to protect scope and demo reliability: no accounts/production auth, polling not WebSockets, no disconnect recovery, subjective scoring, no moderation/history/audio, local Docker only, no production scale. Design choices — not unfinished MVP work.</a:t>
-            </a:r>
-            <a:endParaRPr lang="en-US" sz="1200" dirty="0"/>
+              <a:t>LiveKit is part of this project’s defined solution (not an IU-required audio stack). Managed LiveKit reduced:</a:t>
+            </a:r>
+            <a:endParaRPr lang="en-US" sz="1100" dirty="0"/>
+          </a:p>
+          <a:p>
+            <a:pPr indent="0" marL="0">
+              <a:buNone/>
+            </a:pPr>
+            <a:r>
+              <a:rPr lang="en-US" sz="1100" dirty="0">
+                <a:solidFill>
+                  <a:srgbClr val="E8EEF7"/>
+                </a:solidFill>
+              </a:rPr>
+              <a:t>• signaling complexity</a:t>
+            </a:r>
+            <a:endParaRPr lang="en-US" sz="1100" dirty="0"/>
+          </a:p>
+          <a:p>
+            <a:pPr indent="0" marL="0">
+              <a:buNone/>
+            </a:pPr>
+            <a:r>
+              <a:rPr lang="en-US" sz="1100" dirty="0">
+                <a:solidFill>
+                  <a:srgbClr val="E8EEF7"/>
+                </a:solidFill>
+              </a:rPr>
+              <a:t>• TURN/STUN responsibility</a:t>
+            </a:r>
+            <a:endParaRPr lang="en-US" sz="1100" dirty="0"/>
+          </a:p>
+          <a:p>
+            <a:pPr indent="0" marL="0">
+              <a:buNone/>
+            </a:pPr>
+            <a:r>
+              <a:rPr lang="en-US" sz="1100" dirty="0">
+                <a:solidFill>
+                  <a:srgbClr val="E8EEF7"/>
+                </a:solidFill>
+              </a:rPr>
+              <a:t>• connection-management complexity</a:t>
+            </a:r>
+            <a:endParaRPr lang="en-US" sz="1100" dirty="0"/>
+          </a:p>
+          <a:p>
+            <a:pPr indent="0" marL="0">
+              <a:buNone/>
+            </a:pPr>
+            <a:r>
+              <a:rPr lang="en-US" sz="1100" dirty="0">
+                <a:solidFill>
+                  <a:srgbClr val="E8EEF7"/>
+                </a:solidFill>
+              </a:rPr>
+              <a:t>• development time</a:t>
+            </a:r>
+            <a:endParaRPr lang="en-US" sz="1100" dirty="0"/>
+          </a:p>
+          <a:p>
+            <a:pPr indent="0" marL="0">
+              <a:buNone/>
+            </a:pPr>
+            <a:endParaRPr lang="en-US" sz="1100" dirty="0"/>
+          </a:p>
+          <a:p>
+            <a:pPr indent="0" marL="0">
+              <a:buNone/>
+            </a:pPr>
+            <a:r>
+              <a:rPr lang="en-US" sz="1100" dirty="0">
+                <a:solidFill>
+                  <a:srgbClr val="E8EEF7"/>
+                </a:solidFill>
+              </a:rPr>
+              <a:t>(Technical API: LiveKit official docs.)</a:t>
+            </a:r>
+            <a:endParaRPr lang="en-US" sz="1100" dirty="0"/>
+          </a:p>
+          <a:p>
+            <a:pPr indent="0" marL="0">
+              <a:buNone/>
+            </a:pPr>
+            <a:endParaRPr lang="en-US" sz="1100" dirty="0"/>
+          </a:p>
+          <a:p>
+            <a:pPr indent="0" marL="0">
+              <a:buNone/>
+            </a:pPr>
+            <a:r>
+              <a:rPr lang="en-US" sz="1100" dirty="0">
+                <a:solidFill>
+                  <a:srgbClr val="E8EEF7"/>
+                </a:solidFill>
+              </a:rPr>
+              <a:t>Limits: Cloud + internet, demo reconnection, no recording/transcription/moderation, temporary sessions, polling for game state.</a:t>
+            </a:r>
+            <a:endParaRPr lang="en-US" sz="1100" dirty="0"/>
           </a:p>
         </p:txBody>
       </p:sp>
@@ -5912,7 +5997,7 @@
                   <a:srgbClr val="E8EEF7"/>
                 </a:solidFill>
               </a:rPr>
-              <a:t>Explicit exclusions reduced delivery risk</a:t>
+              <a:t>Managed LiveKit avoided raw WebRTC infrastructure</a:t>
             </a:r>
             <a:endParaRPr lang="en-US" sz="1300" dirty="0"/>
           </a:p>
@@ -5930,7 +6015,7 @@
                   <a:srgbClr val="E8EEF7"/>
                 </a:solidFill>
               </a:rPr>
-              <a:t>Server-owned state simplified multiplayer consistency</a:t>
+              <a:t>Server-owned game state + short-lived media tokens</a:t>
             </a:r>
             <a:endParaRPr lang="en-US" sz="1300" dirty="0"/>
           </a:p>
@@ -5948,7 +6033,7 @@
                   <a:srgbClr val="E8EEF7"/>
                 </a:solidFill>
               </a:rPr>
-              <a:t>Polling was adequate for a two-player demo</a:t>
+              <a:t>Polling adequate for game sync; LiveKit for audio only</a:t>
             </a:r>
             <a:endParaRPr lang="en-US" sz="1300" dirty="0"/>
           </a:p>
@@ -5966,7 +6051,7 @@
                   <a:srgbClr val="E8EEF7"/>
                 </a:solidFill>
               </a:rPr>
-              <a:t>Focused tests beat high test volume</a:t>
+              <a:t>Focused tests (token, audio states, third flag) beat volume</a:t>
             </a:r>
             <a:endParaRPr lang="en-US" sz="1300" dirty="0"/>
           </a:p>
@@ -6060,7 +6145,7 @@
                   <a:srgbClr val="E8EEF7"/>
                 </a:solidFill>
               </a:rPr>
-              <a:t>WebSockets / optional WebRTC audio</a:t>
+              <a:t>WebSockets for game state; advanced reconnect</a:t>
             </a:r>
             <a:endParaRPr lang="en-US" sz="1300" dirty="0"/>
           </a:p>
@@ -6078,7 +6163,7 @@
                   <a:srgbClr val="E8EEF7"/>
                 </a:solidFill>
               </a:rPr>
-              <a:t>Moderation &amp; rankings</a:t>
+              <a:t>Recording / transcription / voice moderation</a:t>
             </a:r>
             <a:endParaRPr lang="en-US" sz="1300" dirty="0"/>
           </a:p>
@@ -6096,7 +6181,7 @@
                   <a:srgbClr val="E8EEF7"/>
                 </a:solidFill>
               </a:rPr>
-              <a:t>Cloud deployment &amp; stronger security ops</a:t>
+              <a:t>Cloud deploy of the app stack; rankings</a:t>
             </a:r>
             <a:endParaRPr lang="en-US" sz="1300" dirty="0"/>
           </a:p>
@@ -7011,8 +7096,8 @@
         </p:nvSpPr>
         <p:spPr>
           <a:xfrm>
-            <a:off x="457200" y="1325880"/>
-            <a:ext cx="8229600" cy="3200400"/>
+            <a:off x="457200" y="1280160"/>
+            <a:ext cx="8229600" cy="3246120"/>
           </a:xfrm>
           <a:prstGeom prst="rect">
             <a:avLst/>
@@ -7026,121 +7111,172 @@
           <a:p>
             <a:pPr indent="0" marL="0">
               <a:spcAft>
-                <a:spcPts val="600"/>
+                <a:spcPts val="500"/>
               </a:spcAft>
               <a:buNone/>
             </a:pPr>
             <a:r>
-              <a:rPr lang="en-US" sz="1100" dirty="0">
+              <a:rPr lang="en-US" sz="1000" dirty="0">
                 <a:solidFill>
                   <a:srgbClr val="E8EEF7"/>
                 </a:solidFill>
               </a:rPr>
               <a:t>IU International University of Applied Sciences. (n.d.). Task for course DLBSEPPSD01_E – Software Development [Examination task]. Examination Office.</a:t>
             </a:r>
-            <a:endParaRPr lang="en-US" sz="1100" dirty="0"/>
+            <a:endParaRPr lang="en-US" sz="1000" dirty="0"/>
           </a:p>
           <a:p>
             <a:pPr indent="0" marL="0">
               <a:spcAft>
-                <a:spcPts val="600"/>
+                <a:spcPts val="500"/>
               </a:spcAft>
               <a:buNone/>
             </a:pPr>
             <a:r>
-              <a:rPr lang="en-US" sz="1100" dirty="0">
+              <a:rPr lang="en-US" sz="1000" dirty="0">
                 <a:solidFill>
                   <a:srgbClr val="E8EEF7"/>
                 </a:solidFill>
               </a:rPr>
               <a:t>IU International University of Applied Sciences. (n.d.). Guidelines for the creation of an oral project report. Examination Office.</a:t>
             </a:r>
-            <a:endParaRPr lang="en-US" sz="1100" dirty="0"/>
+            <a:endParaRPr lang="en-US" sz="1000" dirty="0"/>
           </a:p>
           <a:p>
             <a:pPr indent="0" marL="0">
               <a:spcAft>
-                <a:spcPts val="600"/>
+                <a:spcPts val="500"/>
               </a:spcAft>
               <a:buNone/>
             </a:pPr>
             <a:r>
-              <a:rPr lang="en-US" sz="1100" dirty="0">
+              <a:rPr lang="en-US" sz="1000" dirty="0">
                 <a:solidFill>
                   <a:srgbClr val="E8EEF7"/>
                 </a:solidFill>
               </a:rPr>
               <a:t>Meta Platforms. (n.d.). React documentation. https://react.dev/</a:t>
             </a:r>
-            <a:endParaRPr lang="en-US" sz="1100" dirty="0"/>
+            <a:endParaRPr lang="en-US" sz="1000" dirty="0"/>
           </a:p>
           <a:p>
             <a:pPr indent="0" marL="0">
               <a:spcAft>
-                <a:spcPts val="600"/>
+                <a:spcPts val="500"/>
               </a:spcAft>
               <a:buNone/>
             </a:pPr>
             <a:r>
-              <a:rPr lang="en-US" sz="1100" dirty="0">
+              <a:rPr lang="en-US" sz="1000" dirty="0">
                 <a:solidFill>
                   <a:srgbClr val="E8EEF7"/>
                 </a:solidFill>
               </a:rPr>
               <a:t>OpenJS Foundation. (n.d.). Express — Node.js web application framework. https://expressjs.com/</a:t>
             </a:r>
-            <a:endParaRPr lang="en-US" sz="1100" dirty="0"/>
+            <a:endParaRPr lang="en-US" sz="1000" dirty="0"/>
           </a:p>
           <a:p>
             <a:pPr indent="0" marL="0">
               <a:spcAft>
-                <a:spcPts val="600"/>
+                <a:spcPts val="500"/>
               </a:spcAft>
               <a:buNone/>
             </a:pPr>
             <a:r>
-              <a:rPr lang="en-US" sz="1100" dirty="0">
+              <a:rPr lang="en-US" sz="1000" dirty="0">
                 <a:solidFill>
                   <a:srgbClr val="E8EEF7"/>
                 </a:solidFill>
               </a:rPr>
               <a:t>PostgreSQL Global Development Group. (n.d.). PostgreSQL documentation. https://www.postgresql.org/docs/</a:t>
             </a:r>
-            <a:endParaRPr lang="en-US" sz="1100" dirty="0"/>
+            <a:endParaRPr lang="en-US" sz="1000" dirty="0"/>
           </a:p>
           <a:p>
             <a:pPr indent="0" marL="0">
               <a:spcAft>
-                <a:spcPts val="600"/>
+                <a:spcPts val="500"/>
               </a:spcAft>
               <a:buNone/>
             </a:pPr>
             <a:r>
-              <a:rPr lang="en-US" sz="1100" dirty="0">
+              <a:rPr lang="en-US" sz="1000" dirty="0">
                 <a:solidFill>
                   <a:srgbClr val="E8EEF7"/>
                 </a:solidFill>
               </a:rPr>
               <a:t>Docker Inc. (n.d.). Docker Compose documentation. https://docs.docker.com/compose/</a:t>
             </a:r>
-            <a:endParaRPr lang="en-US" sz="1100" dirty="0"/>
+            <a:endParaRPr lang="en-US" sz="1000" dirty="0"/>
           </a:p>
           <a:p>
             <a:pPr indent="0" marL="0">
               <a:spcAft>
-                <a:spcPts val="600"/>
+                <a:spcPts val="500"/>
               </a:spcAft>
               <a:buNone/>
             </a:pPr>
             <a:r>
-              <a:rPr lang="en-US" sz="1100" dirty="0">
+              <a:rPr lang="en-US" sz="1000" dirty="0">
                 <a:solidFill>
                   <a:srgbClr val="E8EEF7"/>
                 </a:solidFill>
               </a:rPr>
+              <a:t>LiveKit. (n.d.). LiveKit documentation. https://docs.livekit.io/</a:t>
+            </a:r>
+            <a:endParaRPr lang="en-US" sz="1000" dirty="0"/>
+          </a:p>
+          <a:p>
+            <a:pPr indent="0" marL="0">
+              <a:spcAft>
+                <a:spcPts val="500"/>
+              </a:spcAft>
+              <a:buNone/>
+            </a:pPr>
+            <a:r>
+              <a:rPr lang="en-US" sz="1000" dirty="0">
+                <a:solidFill>
+                  <a:srgbClr val="E8EEF7"/>
+                </a:solidFill>
+              </a:rPr>
+              <a:t>LiveKit. (n.d.). Access tokens. https://docs.livekit.io/home/server/generating-tokens/</a:t>
+            </a:r>
+            <a:endParaRPr lang="en-US" sz="1000" dirty="0"/>
+          </a:p>
+          <a:p>
+            <a:pPr indent="0" marL="0">
+              <a:spcAft>
+                <a:spcPts val="500"/>
+              </a:spcAft>
+              <a:buNone/>
+            </a:pPr>
+            <a:r>
+              <a:rPr lang="en-US" sz="1000" dirty="0">
+                <a:solidFill>
+                  <a:srgbClr val="E8EEF7"/>
+                </a:solidFill>
+              </a:rPr>
+              <a:t>LiveKit. (n.d.). JavaScript client SDK. https://docs.livekit.io/home/client/connect/</a:t>
+            </a:r>
+            <a:endParaRPr lang="en-US" sz="1000" dirty="0"/>
+          </a:p>
+          <a:p>
+            <a:pPr indent="0" marL="0">
+              <a:spcAft>
+                <a:spcPts val="500"/>
+              </a:spcAft>
+              <a:buNone/>
+            </a:pPr>
+            <a:r>
+              <a:rPr lang="en-US" sz="1000" dirty="0">
+                <a:solidFill>
+                  <a:srgbClr val="E8EEF7"/>
+                </a:solidFill>
+              </a:rPr>
               <a:t>Kanaan, M. B. (2026). Minduel Lite [Computer software]. GitHub. https://github.com/MahmoudBKanaan/MiduelLite</a:t>
             </a:r>
-            <a:endParaRPr lang="en-US" sz="1100" dirty="0"/>
+            <a:endParaRPr lang="en-US" sz="1000" dirty="0"/>
           </a:p>
         </p:txBody>
       </p:sp>
@@ -7797,7 +7933,7 @@
                   <a:srgbClr val="E8EEF7"/>
                 </a:solidFill>
               </a:rPr>
-              <a:t>Short intellectual interaction is often blocked by registration, permanent profiles, and social features that are unnecessary for a brief two-player exchange.</a:t>
+              <a:t>Short intellectual interaction is often blocked by registration, permanent profiles, and heavy multiplayer platforms. Text-only flows also remove natural spoken exchange for a brief two-player duel.</a:t>
             </a:r>
             <a:endParaRPr lang="en-US" sz="1300" dirty="0"/>
           </a:p>
@@ -7860,7 +7996,7 @@
                   <a:srgbClr val="3ECF8E"/>
                 </a:solidFill>
               </a:rPr>
-              <a:t>Objective (Task 2)</a:t>
+              <a:t>Objective (Task 2 + project)</a:t>
             </a:r>
             <a:endParaRPr lang="en-US" sz="1500" dirty="0"/>
           </a:p>
@@ -7896,7 +8032,7 @@
                   <a:srgbClr val="E8EEF7"/>
                 </a:solidFill>
               </a:rPr>
-              <a:t>Deliver a demonstrable full-stack SPA: React frontend, Node/Express backend, PostgreSQL, two-user interaction, automated tests, Docker Compose, and documentation — optimised for submission reliability, not commercial scale.</a:t>
+              <a:t>Deliver a demonstrable full-stack SPA for IU Task 2 (React, Express, PostgreSQL, tests, Docker Compose, docs) with two-user interaction. Live spoken answers via managed LiveKit are part of this project’s defined solution — not a separate IU examination mandate for audio/WebRTC.</a:t>
             </a:r>
             <a:endParaRPr lang="en-US" sz="1300" dirty="0"/>
           </a:p>
@@ -8229,7 +8365,7 @@
                   <a:srgbClr val="E8EEF7"/>
                 </a:solidFill>
               </a:rPr>
-              <a:t>Two-user interaction → turn-based peer-scored match state machine</a:t>
+              <a:t>Spoken two-user interaction → LiveKit room + turn-based peer scoring</a:t>
             </a:r>
             <a:endParaRPr lang="en-US" sz="1400" dirty="0"/>
           </a:p>
@@ -8247,7 +8383,7 @@
                   <a:srgbClr val="E8EEF7"/>
                 </a:solidFill>
               </a:rPr>
-              <a:t>Demonstrable full stack → SPA + API + DB + Docker Compose</a:t>
+              <a:t>Demonstrable full stack → SPA + API + DB + Docker Compose (+ LiveKit Cloud for audio)</a:t>
             </a:r>
             <a:endParaRPr lang="en-US" sz="1400" dirty="0"/>
           </a:p>
@@ -8783,7 +8919,7 @@
                           <a:ea typeface="Calibri" pitchFamily="34" charset="-122"/>
                           <a:cs typeface="Calibri" pitchFamily="34" charset="-120"/>
                         </a:rPr>
-                        <a:t>4 routes; temporary sessions</a:t>
+                        <a:t>Live spoken answers (managed LiveKit)</a:t>
                       </a:r>
                       <a:endParaRPr lang="en-US" sz="1200" dirty="0">
                         <a:latin typeface="Calibri" charset="0"/>
@@ -8851,7 +8987,7 @@
                           <a:ea typeface="Calibri" pitchFamily="34" charset="-122"/>
                           <a:cs typeface="Calibri" pitchFamily="34" charset="-120"/>
                         </a:rPr>
-                        <a:t>WebSockets, WebRTC audio</a:t>
+                        <a:t>Self-hosted WebRTC / TURN stack</a:t>
                       </a:r>
                       <a:endParaRPr lang="en-US" sz="1200" dirty="0">
                         <a:latin typeface="Calibri" charset="0"/>
@@ -8921,7 +9057,7 @@
                           <a:ea typeface="Calibri" pitchFamily="34" charset="-122"/>
                           <a:cs typeface="Calibri" pitchFamily="34" charset="-120"/>
                         </a:rPr>
-                        <a:t>Matchmaking 3→2→1 interests</a:t>
+                        <a:t>Matchmaking 3→2→1; answer-complete</a:t>
                       </a:r>
                       <a:endParaRPr lang="en-US" sz="1200" dirty="0">
                         <a:latin typeface="Calibri" charset="0"/>
@@ -9127,7 +9263,7 @@
                           <a:ea typeface="Calibri" pitchFamily="34" charset="-122"/>
                           <a:cs typeface="Calibri" pitchFamily="34" charset="-120"/>
                         </a:rPr>
-                        <a:t>Cloud / K8s / microservices</a:t>
+                        <a:t>Recording / transcription</a:t>
                       </a:r>
                       <a:endParaRPr lang="en-US" sz="1200" dirty="0">
                         <a:latin typeface="Calibri" charset="0"/>
@@ -9197,7 +9333,7 @@
                           <a:ea typeface="Calibri" pitchFamily="34" charset="-122"/>
                           <a:cs typeface="Calibri" pitchFamily="34" charset="-120"/>
                         </a:rPr>
-                        <a:t>Tests, Docker Compose, docs</a:t>
+                        <a:t>Tests, Docker Compose (3 services), docs</a:t>
                       </a:r>
                       <a:endParaRPr lang="en-US" sz="1200" dirty="0">
                         <a:latin typeface="Calibri" charset="0"/>
@@ -9265,7 +9401,7 @@
                           <a:ea typeface="Calibri" pitchFamily="34" charset="-122"/>
                           <a:cs typeface="Calibri" pitchFamily="34" charset="-120"/>
                         </a:rPr>
-                        <a:t>AI scoring, admin CMS</a:t>
+                        <a:t>K8s / microservices / AI scoring</a:t>
                       </a:r>
                       <a:endParaRPr lang="en-US" sz="1200" dirty="0">
                         <a:latin typeface="Calibri" charset="0"/>
@@ -9583,7 +9719,7 @@
                   <a:srgbClr val="E8EEF7"/>
                 </a:solidFill>
               </a:rPr>
-              <a:t>Increments: concept → foundation → matchmaking → match engine → result → tests/docs → presentation.</a:t>
+              <a:t>Increments: concept → foundation → matchmaking → match → result → LIVE AUDIO → tests/docs → presentation.</a:t>
             </a:r>
             <a:endParaRPr lang="en-US" sz="1300" dirty="0"/>
           </a:p>
@@ -9812,7 +9948,7 @@
                 <a:ea typeface="Calibri" pitchFamily="34" charset="-122"/>
                 <a:cs typeface="Calibri" pitchFamily="34" charset="-120"/>
               </a:rPr>
-              <a:t>2. Planning — user journey (not a UI tour)</a:t>
+              <a:t>2. Planning — user journey (spoken live audio)</a:t>
             </a:r>
             <a:endParaRPr lang="en-US" sz="2400" dirty="0"/>
           </a:p>
@@ -9851,8 +9987,8 @@
         </p:nvSpPr>
         <p:spPr>
           <a:xfrm>
-            <a:off x="457200" y="914400"/>
-            <a:ext cx="8229600" cy="365760"/>
+            <a:off x="457200" y="868680"/>
+            <a:ext cx="8229600" cy="320040"/>
           </a:xfrm>
           <a:prstGeom prst="rect">
             <a:avLst/>
@@ -9868,14 +10004,14 @@
               <a:buNone/>
             </a:pPr>
             <a:r>
-              <a:rPr lang="en-US" sz="1300" i="1" dirty="0">
-                <a:solidFill>
-                  <a:srgbClr val="9AABBF"/>
-                </a:solidFill>
-              </a:rPr>
-              <a:t>Four screens map the planned flow; the oral report emphasises process and architecture around this journey.</a:t>
-            </a:r>
-            <a:endParaRPr lang="en-US" sz="1300" dirty="0"/>
+              <a:rPr lang="en-US" sz="1400" b="1" dirty="0">
+                <a:solidFill>
+                  <a:srgbClr val="4F8CFF"/>
+                </a:solidFill>
+              </a:rPr>
+              <a:t>Welcome → Pool → match created → audio connected → spoken answers → Result</a:t>
+            </a:r>
+            <a:endParaRPr lang="en-US" sz="1400" dirty="0"/>
           </a:p>
         </p:txBody>
       </p:sp>
@@ -9887,8 +10023,8 @@
         </p:nvSpPr>
         <p:spPr>
           <a:xfrm>
-            <a:off x="457200" y="1325880"/>
-            <a:ext cx="8229600" cy="320040"/>
+            <a:off x="457200" y="1188720"/>
+            <a:ext cx="8229600" cy="256032"/>
           </a:xfrm>
           <a:prstGeom prst="rect">
             <a:avLst/>
@@ -9904,14 +10040,14 @@
               <a:buNone/>
             </a:pPr>
             <a:r>
-              <a:rPr lang="en-US" sz="1400" b="1" dirty="0">
-                <a:solidFill>
-                  <a:srgbClr val="4F8CFF"/>
-                </a:solidFill>
-              </a:rPr>
-              <a:t>Welcome → Pool → Match → Result  |  Play again → Pool  |  Reset → Welcome</a:t>
-            </a:r>
-            <a:endParaRPr lang="en-US" sz="1400" dirty="0"/>
+              <a:rPr lang="en-US" sz="1200" i="1" dirty="0">
+                <a:solidFill>
+                  <a:srgbClr val="9AABBF"/>
+                </a:solidFill>
+              </a:rPr>
+              <a:t>Play again → Pool (new match + new LiveKit room)  ·  Reset → Welcome</a:t>
+            </a:r>
+            <a:endParaRPr lang="en-US" sz="1200" dirty="0"/>
           </a:p>
         </p:txBody>
       </p:sp>
@@ -9930,8 +10066,8 @@
         </p:blipFill>
         <p:spPr>
           <a:xfrm>
-            <a:off x="365760" y="1737360"/>
-            <a:ext cx="2011680" cy="2468880"/>
+            <a:off x="365760" y="1554480"/>
+            <a:ext cx="2011680" cy="2606040"/>
           </a:xfrm>
           <a:prstGeom prst="rect">
             <a:avLst/>
@@ -9946,7 +10082,7 @@
         </p:nvSpPr>
         <p:spPr>
           <a:xfrm>
-            <a:off x="365760" y="4251960"/>
+            <a:off x="365760" y="4206240"/>
             <a:ext cx="2011680" cy="228600"/>
           </a:xfrm>
           <a:prstGeom prst="rect">
@@ -9989,8 +10125,8 @@
         </p:blipFill>
         <p:spPr>
           <a:xfrm>
-            <a:off x="2560320" y="1737360"/>
-            <a:ext cx="2011680" cy="2468880"/>
+            <a:off x="2560320" y="1554480"/>
+            <a:ext cx="2011680" cy="2606040"/>
           </a:xfrm>
           <a:prstGeom prst="rect">
             <a:avLst/>
@@ -10005,7 +10141,7 @@
         </p:nvSpPr>
         <p:spPr>
           <a:xfrm>
-            <a:off x="2560320" y="4251960"/>
+            <a:off x="2560320" y="4206240"/>
             <a:ext cx="2011680" cy="228600"/>
           </a:xfrm>
           <a:prstGeom prst="rect">
@@ -10048,8 +10184,8 @@
         </p:blipFill>
         <p:spPr>
           <a:xfrm>
-            <a:off x="4754880" y="1737360"/>
-            <a:ext cx="2011680" cy="2468880"/>
+            <a:off x="4754880" y="1554480"/>
+            <a:ext cx="2011680" cy="2606040"/>
           </a:xfrm>
           <a:prstGeom prst="rect">
             <a:avLst/>
@@ -10064,7 +10200,7 @@
         </p:nvSpPr>
         <p:spPr>
           <a:xfrm>
-            <a:off x="4754880" y="4251960"/>
+            <a:off x="4754880" y="4206240"/>
             <a:ext cx="2011680" cy="228600"/>
           </a:xfrm>
           <a:prstGeom prst="rect">
@@ -10086,7 +10222,7 @@
                   <a:srgbClr val="9AABBF"/>
                 </a:solidFill>
               </a:rPr>
-              <a:t>Match</a:t>
+              <a:t>Match + audio</a:t>
             </a:r>
             <a:endParaRPr lang="en-US" sz="1100" dirty="0"/>
           </a:p>
@@ -10107,8 +10243,8 @@
         </p:blipFill>
         <p:spPr>
           <a:xfrm>
-            <a:off x="6949440" y="1737360"/>
-            <a:ext cx="2011680" cy="2468880"/>
+            <a:off x="6949440" y="1554480"/>
+            <a:ext cx="2011680" cy="2606040"/>
           </a:xfrm>
           <a:prstGeom prst="rect">
             <a:avLst/>
@@ -10123,7 +10259,7 @@
         </p:nvSpPr>
         <p:spPr>
           <a:xfrm>
-            <a:off x="6949440" y="4251960"/>
+            <a:off x="6949440" y="4206240"/>
             <a:ext cx="2011680" cy="228600"/>
           </a:xfrm>
           <a:prstGeom prst="rect">
@@ -10184,7 +10320,7 @@
                 <a:ea typeface="Calibri" pitchFamily="34" charset="-122"/>
                 <a:cs typeface="Calibri" pitchFamily="34" charset="-120"/>
               </a:rPr>
-              <a:t>Figures 2–5. Application screenshots of the planned four-screen journey (own software).</a:t>
+              <a:t>Figures 2–5. Four-screen journey with live spoken match (own software).</a:t>
             </a:r>
             <a:endParaRPr lang="en-US" sz="1000" dirty="0"/>
           </a:p>
@@ -10333,7 +10469,7 @@
                 <a:ea typeface="Calibri" pitchFamily="34" charset="-122"/>
                 <a:cs typeface="Calibri" pitchFamily="34" charset="-120"/>
               </a:rPr>
-              <a:t>3. Architecture — C4 containers</a:t>
+              <a:t>3. Architecture — C4 + LiveKit</a:t>
             </a:r>
             <a:endParaRPr lang="en-US" sz="2400" dirty="0"/>
           </a:p>
@@ -10372,8 +10508,8 @@
         </p:nvSpPr>
         <p:spPr>
           <a:xfrm>
-            <a:off x="457200" y="868680"/>
-            <a:ext cx="8229600" cy="274320"/>
+            <a:off x="457200" y="841248"/>
+            <a:ext cx="8229600" cy="292608"/>
           </a:xfrm>
           <a:prstGeom prst="rect">
             <a:avLst/>
@@ -10389,12 +10525,12 @@
               <a:buNone/>
             </a:pPr>
             <a:r>
-              <a:rPr lang="en-US" sz="1200" i="1" dirty="0">
-                <a:solidFill>
-                  <a:srgbClr val="9AABBF"/>
-                </a:solidFill>
-              </a:rPr>
-              <a:t>Design decision: one SPA, one API, one database — simplest structure that meets Task 2.</a:t>
+              <a:rPr lang="en-US" sz="1200" b="1" dirty="0">
+                <a:solidFill>
+                  <a:srgbClr val="3ECF8E"/>
+                </a:solidFill>
+              </a:rPr>
+              <a:t>Simple distinction: Express + PostgreSQL = game state · LiveKit = live audio · REST polling = game sync</a:t>
             </a:r>
             <a:endParaRPr lang="en-US" sz="1200" dirty="0"/>
           </a:p>
@@ -10415,8 +10551,8 @@
         </p:blipFill>
         <p:spPr>
           <a:xfrm>
-            <a:off x="1188720" y="1143000"/>
-            <a:ext cx="6766560" cy="3200400"/>
+            <a:off x="365760" y="1143000"/>
+            <a:ext cx="5120640" cy="3200400"/>
           </a:xfrm>
           <a:prstGeom prst="rect">
             <a:avLst/>
@@ -10425,7 +10561,236 @@
       </p:pic>
       <p:sp>
         <p:nvSpPr>
-          <p:cNvPr id="6" name="Text 3"/>
+          <p:cNvPr id="6" name="Shape 3"/>
+          <p:cNvSpPr/>
+          <p:nvPr/>
+        </p:nvSpPr>
+        <p:spPr>
+          <a:xfrm>
+            <a:off x="5669280" y="1188720"/>
+            <a:ext cx="3108960" cy="3108960"/>
+          </a:xfrm>
+          <a:prstGeom prst="roundRect">
+            <a:avLst>
+              <a:gd name="adj" fmla="val 2353"/>
+            </a:avLst>
+          </a:prstGeom>
+          <a:solidFill>
+            <a:srgbClr val="1A2332"/>
+          </a:solidFill>
+          <a:ln w="12700">
+            <a:solidFill>
+              <a:srgbClr val="334155"/>
+            </a:solidFill>
+            <a:prstDash val="solid"/>
+          </a:ln>
+        </p:spPr>
+      </p:sp>
+      <p:sp>
+        <p:nvSpPr>
+          <p:cNvPr id="7" name="Text 4"/>
+          <p:cNvSpPr/>
+          <p:nvPr/>
+        </p:nvSpPr>
+        <p:spPr>
+          <a:xfrm>
+            <a:off x="5852160" y="1325880"/>
+            <a:ext cx="2743200" cy="274320"/>
+          </a:xfrm>
+          <a:prstGeom prst="rect">
+            <a:avLst/>
+          </a:prstGeom>
+          <a:noFill/>
+          <a:ln/>
+        </p:spPr>
+        <p:txBody>
+          <a:bodyPr wrap="square" lIns="0" tIns="0" rIns="0" bIns="0" rtlCol="0" anchor="ctr"/>
+          <a:lstStyle/>
+          <a:p>
+            <a:pPr indent="0" marL="0">
+              <a:buNone/>
+            </a:pPr>
+            <a:r>
+              <a:rPr lang="en-US" sz="1300" b="1" dirty="0">
+                <a:solidFill>
+                  <a:srgbClr val="4F8CFF"/>
+                </a:solidFill>
+              </a:rPr>
+              <a:t>Talking points</a:t>
+            </a:r>
+            <a:endParaRPr lang="en-US" sz="1300" dirty="0"/>
+          </a:p>
+        </p:txBody>
+      </p:sp>
+      <p:sp>
+        <p:nvSpPr>
+          <p:cNvPr id="8" name="Text 5"/>
+          <p:cNvSpPr/>
+          <p:nvPr/>
+        </p:nvSpPr>
+        <p:spPr>
+          <a:xfrm>
+            <a:off x="5852160" y="1691640"/>
+            <a:ext cx="2743200" cy="2377440"/>
+          </a:xfrm>
+          <a:prstGeom prst="rect">
+            <a:avLst/>
+          </a:prstGeom>
+          <a:noFill/>
+          <a:ln/>
+        </p:spPr>
+        <p:txBody>
+          <a:bodyPr wrap="square" lIns="0" tIns="0" rIns="0" bIns="0" rtlCol="0" anchor="ctr"/>
+          <a:lstStyle/>
+          <a:p>
+            <a:pPr indent="0" marL="0">
+              <a:buNone/>
+            </a:pPr>
+            <a:r>
+              <a:rPr lang="en-US" sz="1200" dirty="0">
+                <a:solidFill>
+                  <a:srgbClr val="E8EEF7"/>
+                </a:solidFill>
+              </a:rPr>
+              <a:t>• EXPRESS + POSTGRESQL</a:t>
+            </a:r>
+            <a:endParaRPr lang="en-US" sz="1200" dirty="0"/>
+          </a:p>
+          <a:p>
+            <a:pPr indent="0" marL="0">
+              <a:buNone/>
+            </a:pPr>
+            <a:r>
+              <a:rPr lang="en-US" sz="1200" dirty="0">
+                <a:solidFill>
+                  <a:srgbClr val="E8EEF7"/>
+                </a:solidFill>
+              </a:rPr>
+              <a:t>  = authoritative game state</a:t>
+            </a:r>
+            <a:endParaRPr lang="en-US" sz="1200" dirty="0"/>
+          </a:p>
+          <a:p>
+            <a:pPr indent="0" marL="0">
+              <a:buNone/>
+            </a:pPr>
+            <a:endParaRPr lang="en-US" sz="1200" dirty="0"/>
+          </a:p>
+          <a:p>
+            <a:pPr indent="0" marL="0">
+              <a:buNone/>
+            </a:pPr>
+            <a:r>
+              <a:rPr lang="en-US" sz="1200" dirty="0">
+                <a:solidFill>
+                  <a:srgbClr val="E8EEF7"/>
+                </a:solidFill>
+              </a:rPr>
+              <a:t>• LIVEKIT (managed Cloud)</a:t>
+            </a:r>
+            <a:endParaRPr lang="en-US" sz="1200" dirty="0"/>
+          </a:p>
+          <a:p>
+            <a:pPr indent="0" marL="0">
+              <a:buNone/>
+            </a:pPr>
+            <a:r>
+              <a:rPr lang="en-US" sz="1200" dirty="0">
+                <a:solidFill>
+                  <a:srgbClr val="E8EEF7"/>
+                </a:solidFill>
+              </a:rPr>
+              <a:t>  = live microphone audio</a:t>
+            </a:r>
+            <a:endParaRPr lang="en-US" sz="1200" dirty="0"/>
+          </a:p>
+          <a:p>
+            <a:pPr indent="0" marL="0">
+              <a:buNone/>
+            </a:pPr>
+            <a:endParaRPr lang="en-US" sz="1200" dirty="0"/>
+          </a:p>
+          <a:p>
+            <a:pPr indent="0" marL="0">
+              <a:buNone/>
+            </a:pPr>
+            <a:r>
+              <a:rPr lang="en-US" sz="1200" dirty="0">
+                <a:solidFill>
+                  <a:srgbClr val="E8EEF7"/>
+                </a:solidFill>
+              </a:rPr>
+              <a:t>• REST polling ≈ 1s</a:t>
+            </a:r>
+            <a:endParaRPr lang="en-US" sz="1200" dirty="0"/>
+          </a:p>
+          <a:p>
+            <a:pPr indent="0" marL="0">
+              <a:buNone/>
+            </a:pPr>
+            <a:r>
+              <a:rPr lang="en-US" sz="1200" dirty="0">
+                <a:solidFill>
+                  <a:srgbClr val="E8EEF7"/>
+                </a:solidFill>
+              </a:rPr>
+              <a:t>  = game synchronisation</a:t>
+            </a:r>
+            <a:endParaRPr lang="en-US" sz="1200" dirty="0"/>
+          </a:p>
+          <a:p>
+            <a:pPr indent="0" marL="0">
+              <a:buNone/>
+            </a:pPr>
+            <a:endParaRPr lang="en-US" sz="1200" dirty="0"/>
+          </a:p>
+          <a:p>
+            <a:pPr indent="0" marL="0">
+              <a:buNone/>
+            </a:pPr>
+            <a:r>
+              <a:rPr lang="en-US" sz="1200" dirty="0">
+                <a:solidFill>
+                  <a:srgbClr val="E8EEF7"/>
+                </a:solidFill>
+              </a:rPr>
+              <a:t>• LiveKit is part of the</a:t>
+            </a:r>
+            <a:endParaRPr lang="en-US" sz="1200" dirty="0"/>
+          </a:p>
+          <a:p>
+            <a:pPr indent="0" marL="0">
+              <a:buNone/>
+            </a:pPr>
+            <a:r>
+              <a:rPr lang="en-US" sz="1200" dirty="0">
+                <a:solidFill>
+                  <a:srgbClr val="E8EEF7"/>
+                </a:solidFill>
+              </a:rPr>
+              <a:t>  project’s defined solution</a:t>
+            </a:r>
+            <a:endParaRPr lang="en-US" sz="1200" dirty="0"/>
+          </a:p>
+          <a:p>
+            <a:pPr indent="0" marL="0">
+              <a:buNone/>
+            </a:pPr>
+            <a:r>
+              <a:rPr lang="en-US" sz="1200" dirty="0">
+                <a:solidFill>
+                  <a:srgbClr val="E8EEF7"/>
+                </a:solidFill>
+              </a:rPr>
+              <a:t>  (not an IU audio mandate)</a:t>
+            </a:r>
+            <a:endParaRPr lang="en-US" sz="1200" dirty="0"/>
+          </a:p>
+        </p:txBody>
+      </p:sp>
+      <p:sp>
+        <p:nvSpPr>
+          <p:cNvPr id="9" name="Text 6"/>
           <p:cNvSpPr/>
           <p:nvPr/>
         </p:nvSpPr>
@@ -10456,7 +10821,7 @@
                 <a:ea typeface="Calibri" pitchFamily="34" charset="-122"/>
                 <a:cs typeface="Calibri" pitchFamily="34" charset="-120"/>
               </a:rPr>
-              <a:t>Figure 6. C4 container diagram (own diagram). Backend is authoritative for game state.</a:t>
+              <a:t>Figure 6. C4 + external LiveKit (own diagram). Media API: LiveKit docs (external).</a:t>
             </a:r>
             <a:endParaRPr lang="en-US" sz="1000" dirty="0"/>
           </a:p>
@@ -10464,7 +10829,7 @@
       </p:sp>
       <p:sp>
         <p:nvSpPr>
-          <p:cNvPr id="7" name="Text 4"/>
+          <p:cNvPr id="10" name="Text 7"/>
           <p:cNvSpPr/>
           <p:nvPr/>
         </p:nvSpPr>
@@ -10503,7 +10868,7 @@
       </p:sp>
       <p:sp>
         <p:nvSpPr>
-          <p:cNvPr id="8" name="Text 5"/>
+          <p:cNvPr id="11" name="Text 8"/>
           <p:cNvSpPr/>
           <p:nvPr/>
         </p:nvSpPr>
@@ -10692,7 +11057,7 @@
                 <a:ea typeface="Calibri" pitchFamily="34" charset="-122"/>
                 <a:cs typeface="Calibri" pitchFamily="34" charset="-120"/>
               </a:rPr>
-              <a:t>Figure 7. ER diagram (own diagram). Five tables; 100×10 = 1,000 seeded questions.</a:t>
+              <a:t>Figure 7. ER (own). answer_completed booleans; no answer TEXT; LiveKit not in ER (audio not persisted).</a:t>
             </a:r>
             <a:endParaRPr lang="en-US" sz="1000" dirty="0"/>
           </a:p>
